--- a/Linux-Kernel-Presentation.pptx
+++ b/Linux-Kernel-Presentation.pptx
@@ -328,7 +328,7 @@
             <a:fld id="{1D8BD707-D9CF-40AE-B4C6-C98DA3205C09}" type="datetimeFigureOut">
               <a:rPr lang="en-US" smtClean="0"/>
               <a:pPr/>
-              <a:t>02/20/2026</a:t>
+              <a:t>07/21/2026</a:t>
             </a:fld>
             <a:endParaRPr lang="en-US"/>
           </a:p>
@@ -493,7 +493,7 @@
             <a:fld id="{1D8BD707-D9CF-40AE-B4C6-C98DA3205C09}" type="datetimeFigureOut">
               <a:rPr lang="en-US" smtClean="0"/>
               <a:pPr/>
-              <a:t>02/20/2026</a:t>
+              <a:t>07/21/2026</a:t>
             </a:fld>
             <a:endParaRPr lang="en-US"/>
           </a:p>
@@ -668,7 +668,7 @@
             <a:fld id="{1D8BD707-D9CF-40AE-B4C6-C98DA3205C09}" type="datetimeFigureOut">
               <a:rPr lang="en-US" smtClean="0"/>
               <a:pPr/>
-              <a:t>02/20/2026</a:t>
+              <a:t>07/21/2026</a:t>
             </a:fld>
             <a:endParaRPr lang="en-US"/>
           </a:p>
@@ -833,7 +833,7 @@
             <a:fld id="{1D8BD707-D9CF-40AE-B4C6-C98DA3205C09}" type="datetimeFigureOut">
               <a:rPr lang="en-US" smtClean="0"/>
               <a:pPr/>
-              <a:t>02/20/2026</a:t>
+              <a:t>07/21/2026</a:t>
             </a:fld>
             <a:endParaRPr lang="en-US"/>
           </a:p>
@@ -1075,7 +1075,7 @@
             <a:fld id="{1D8BD707-D9CF-40AE-B4C6-C98DA3205C09}" type="datetimeFigureOut">
               <a:rPr lang="en-US" smtClean="0"/>
               <a:pPr/>
-              <a:t>02/20/2026</a:t>
+              <a:t>07/21/2026</a:t>
             </a:fld>
             <a:endParaRPr lang="en-US"/>
           </a:p>
@@ -1357,7 +1357,7 @@
             <a:fld id="{1D8BD707-D9CF-40AE-B4C6-C98DA3205C09}" type="datetimeFigureOut">
               <a:rPr lang="en-US" smtClean="0"/>
               <a:pPr/>
-              <a:t>02/20/2026</a:t>
+              <a:t>07/21/2026</a:t>
             </a:fld>
             <a:endParaRPr lang="en-US"/>
           </a:p>
@@ -1773,7 +1773,7 @@
             <a:fld id="{1D8BD707-D9CF-40AE-B4C6-C98DA3205C09}" type="datetimeFigureOut">
               <a:rPr lang="en-US" smtClean="0"/>
               <a:pPr/>
-              <a:t>02/20/2026</a:t>
+              <a:t>07/21/2026</a:t>
             </a:fld>
             <a:endParaRPr lang="en-US"/>
           </a:p>
@@ -1887,7 +1887,7 @@
             <a:fld id="{1D8BD707-D9CF-40AE-B4C6-C98DA3205C09}" type="datetimeFigureOut">
               <a:rPr lang="en-US" smtClean="0"/>
               <a:pPr/>
-              <a:t>02/20/2026</a:t>
+              <a:t>07/21/2026</a:t>
             </a:fld>
             <a:endParaRPr lang="en-US"/>
           </a:p>
@@ -1979,7 +1979,7 @@
             <a:fld id="{1D8BD707-D9CF-40AE-B4C6-C98DA3205C09}" type="datetimeFigureOut">
               <a:rPr lang="en-US" smtClean="0"/>
               <a:pPr/>
-              <a:t>02/20/2026</a:t>
+              <a:t>07/21/2026</a:t>
             </a:fld>
             <a:endParaRPr lang="en-US"/>
           </a:p>
@@ -2251,7 +2251,7 @@
             <a:fld id="{1D8BD707-D9CF-40AE-B4C6-C98DA3205C09}" type="datetimeFigureOut">
               <a:rPr lang="en-US" smtClean="0"/>
               <a:pPr/>
-              <a:t>02/20/2026</a:t>
+              <a:t>07/21/2026</a:t>
             </a:fld>
             <a:endParaRPr lang="en-US"/>
           </a:p>
@@ -2500,7 +2500,7 @@
             <a:fld id="{1D8BD707-D9CF-40AE-B4C6-C98DA3205C09}" type="datetimeFigureOut">
               <a:rPr lang="en-US" smtClean="0"/>
               <a:pPr/>
-              <a:t>02/20/2026</a:t>
+              <a:t>07/21/2026</a:t>
             </a:fld>
             <a:endParaRPr lang="en-US"/>
           </a:p>
@@ -2708,7 +2708,7 @@
             <a:fld id="{1D8BD707-D9CF-40AE-B4C6-C98DA3205C09}" type="datetimeFigureOut">
               <a:rPr lang="en-US" smtClean="0"/>
               <a:pPr/>
-              <a:t>02/20/2026</a:t>
+              <a:t>07/21/2026</a:t>
             </a:fld>
             <a:endParaRPr lang="en-US"/>
           </a:p>
@@ -3254,10 +3254,10 @@
             </a:pathLst>
           </a:custGeom>
           <a:blipFill>
-            <a:blip r:embed="rId2">
+            <a:blip>
               <a:extLst>
                 <a:ext uri="{96DAC541-7B7A-43D3-8B79-37D633B846F1}">
-                  <asvg:svgBlip xmlns:asvg="http://schemas.microsoft.com/office/drawing/2016/SVG/main" r:embed="rId3"/>
+                  <asvg:svgBlip xmlns:asvg="http://schemas.microsoft.com/office/drawing/2016/SVG/main" r:embed="rId2"/>
                 </a:ext>
               </a:extLst>
             </a:blip>
@@ -3429,10 +3429,10 @@
             </a:pathLst>
           </a:custGeom>
           <a:blipFill>
-            <a:blip r:embed="rId4">
+            <a:blip>
               <a:extLst>
                 <a:ext uri="{96DAC541-7B7A-43D3-8B79-37D633B846F1}">
-                  <asvg:svgBlip xmlns:asvg="http://schemas.microsoft.com/office/drawing/2016/SVG/main" r:embed="rId5"/>
+                  <asvg:svgBlip xmlns:asvg="http://schemas.microsoft.com/office/drawing/2016/SVG/main" r:embed="rId3"/>
                 </a:ext>
               </a:extLst>
             </a:blip>
@@ -3821,12 +3821,12 @@
           <p:nvPr/>
         </p:nvPicPr>
         <p:blipFill>
-          <a:blip r:embed="rId6" cstate="print">
+          <a:blip r:embed="rId4" cstate="print">
             <a:grayscl/>
             <a:extLst>
               <a:ext uri="{BEBA8EAE-BF5A-486C-A8C5-ECC9F3942E4B}">
                 <a14:imgProps xmlns:a14="http://schemas.microsoft.com/office/drawing/2010/main">
-                  <a14:imgLayer r:embed="rId7">
+                  <a14:imgLayer r:embed="rId5">
                     <a14:imgEffect>
                       <a14:backgroundRemoval t="3008" b="96241" l="4478" r="96269">
                         <a14:foregroundMark x1="28358" y1="14286" x2="32836" y2="17293"/>
@@ -3969,10 +3969,10 @@
             </a:pathLst>
           </a:custGeom>
           <a:blipFill>
-            <a:blip r:embed="rId2">
+            <a:blip>
               <a:extLst>
                 <a:ext uri="{96DAC541-7B7A-43D3-8B79-37D633B846F1}">
-                  <asvg:svgBlip xmlns:asvg="http://schemas.microsoft.com/office/drawing/2016/SVG/main" r:embed="rId3"/>
+                  <asvg:svgBlip xmlns:asvg="http://schemas.microsoft.com/office/drawing/2016/SVG/main" r:embed="rId2"/>
                 </a:ext>
               </a:extLst>
             </a:blip>
@@ -4064,11 +4064,11 @@
             </a:pathLst>
           </a:custGeom>
           <a:blipFill>
-            <a:blip r:embed="rId4">
+            <a:blip>
               <a:alphaModFix amt="48000"/>
               <a:extLst>
                 <a:ext uri="{96DAC541-7B7A-43D3-8B79-37D633B846F1}">
-                  <asvg:svgBlip xmlns:asvg="http://schemas.microsoft.com/office/drawing/2016/SVG/main" r:embed="rId5"/>
+                  <asvg:svgBlip xmlns:asvg="http://schemas.microsoft.com/office/drawing/2016/SVG/main" r:embed="rId3"/>
                 </a:ext>
               </a:extLst>
             </a:blip>
@@ -4388,12 +4388,12 @@
           <p:nvPr/>
         </p:nvPicPr>
         <p:blipFill>
-          <a:blip r:embed="rId6" cstate="print">
+          <a:blip r:embed="rId4" cstate="print">
             <a:grayscl/>
             <a:extLst>
               <a:ext uri="{BEBA8EAE-BF5A-486C-A8C5-ECC9F3942E4B}">
                 <a14:imgProps xmlns:a14="http://schemas.microsoft.com/office/drawing/2010/main">
-                  <a14:imgLayer r:embed="rId7">
+                  <a14:imgLayer r:embed="rId5">
                     <a14:imgEffect>
                       <a14:backgroundRemoval t="3008" b="96241" l="4478" r="96269">
                         <a14:foregroundMark x1="28358" y1="14286" x2="32836" y2="17293"/>
@@ -4455,11 +4455,11 @@
           <p:nvPr/>
         </p:nvPicPr>
         <p:blipFill>
-          <a:blip r:embed="rId8">
+          <a:blip r:embed="rId6">
             <a:extLst>
               <a:ext uri="{BEBA8EAE-BF5A-486C-A8C5-ECC9F3942E4B}">
                 <a14:imgProps xmlns:a14="http://schemas.microsoft.com/office/drawing/2010/main">
-                  <a14:imgLayer r:embed="rId9">
+                  <a14:imgLayer r:embed="rId7">
                     <a14:imgEffect>
                       <a14:sharpenSoften amount="25000"/>
                     </a14:imgEffect>
@@ -4603,11 +4603,11 @@
           <p:nvPr/>
         </p:nvPicPr>
         <p:blipFill>
-          <a:blip r:embed="rId10">
+          <a:blip r:embed="rId8">
             <a:extLst>
               <a:ext uri="{BEBA8EAE-BF5A-486C-A8C5-ECC9F3942E4B}">
                 <a14:imgProps xmlns:a14="http://schemas.microsoft.com/office/drawing/2010/main">
-                  <a14:imgLayer r:embed="rId11">
+                  <a14:imgLayer r:embed="rId9">
                     <a14:imgEffect>
                       <a14:sharpenSoften amount="25000"/>
                     </a14:imgEffect>
@@ -5131,11 +5131,11 @@
           <p:nvPr/>
         </p:nvPicPr>
         <p:blipFill>
-          <a:blip r:embed="rId12">
+          <a:blip r:embed="rId10">
             <a:extLst>
               <a:ext uri="{BEBA8EAE-BF5A-486C-A8C5-ECC9F3942E4B}">
                 <a14:imgProps xmlns:a14="http://schemas.microsoft.com/office/drawing/2010/main">
-                  <a14:imgLayer r:embed="rId13">
+                  <a14:imgLayer r:embed="rId11">
                     <a14:imgEffect>
                       <a14:sharpenSoften amount="25000"/>
                     </a14:imgEffect>
@@ -5390,7 +5390,7 @@
                 <a:ea typeface="Garet"/>
                 <a:cs typeface="Garet"/>
                 <a:sym typeface="Garet"/>
-                <a:hlinkClick r:id="rId14">
+                <a:hlinkClick r:id="rId12">
                   <a:extLst>
                     <a:ext uri="{A12FA001-AC4F-418D-AE19-62706E023703}">
                       <ahyp:hlinkClr xmlns:ahyp="http://schemas.microsoft.com/office/drawing/2018/hyperlinkcolor" val="tx"/>
@@ -5617,10 +5617,10 @@
             </a:pathLst>
           </a:custGeom>
           <a:blipFill>
-            <a:blip r:embed="rId2">
+            <a:blip>
               <a:extLst>
                 <a:ext uri="{96DAC541-7B7A-43D3-8B79-37D633B846F1}">
-                  <asvg:svgBlip xmlns:asvg="http://schemas.microsoft.com/office/drawing/2016/SVG/main" r:embed="rId3"/>
+                  <asvg:svgBlip xmlns:asvg="http://schemas.microsoft.com/office/drawing/2016/SVG/main" r:embed="rId2"/>
                 </a:ext>
               </a:extLst>
             </a:blip>
@@ -6751,12 +6751,12 @@
           <p:nvPr/>
         </p:nvPicPr>
         <p:blipFill>
-          <a:blip r:embed="rId4" cstate="print">
+          <a:blip r:embed="rId3" cstate="print">
             <a:grayscl/>
             <a:extLst>
               <a:ext uri="{BEBA8EAE-BF5A-486C-A8C5-ECC9F3942E4B}">
                 <a14:imgProps xmlns:a14="http://schemas.microsoft.com/office/drawing/2010/main">
-                  <a14:imgLayer r:embed="rId5">
+                  <a14:imgLayer r:embed="rId4">
                     <a14:imgEffect>
                       <a14:backgroundRemoval t="3008" b="96241" l="4478" r="96269">
                         <a14:foregroundMark x1="28358" y1="14286" x2="32836" y2="17293"/>
@@ -6818,7 +6818,7 @@
           <p:nvPr/>
         </p:nvPicPr>
         <p:blipFill>
-          <a:blip r:embed="rId6"/>
+          <a:blip r:embed="rId5"/>
           <a:stretch>
             <a:fillRect/>
           </a:stretch>
@@ -7115,10 +7115,10 @@
             </a:pathLst>
           </a:custGeom>
           <a:blipFill>
-            <a:blip r:embed="rId2">
+            <a:blip>
               <a:extLst>
                 <a:ext uri="{96DAC541-7B7A-43D3-8B79-37D633B846F1}">
-                  <asvg:svgBlip xmlns:asvg="http://schemas.microsoft.com/office/drawing/2016/SVG/main" r:embed="rId3"/>
+                  <asvg:svgBlip xmlns:asvg="http://schemas.microsoft.com/office/drawing/2016/SVG/main" r:embed="rId2"/>
                 </a:ext>
               </a:extLst>
             </a:blip>
@@ -7497,12 +7497,12 @@
           <p:nvPr/>
         </p:nvPicPr>
         <p:blipFill>
-          <a:blip r:embed="rId4" cstate="print">
+          <a:blip r:embed="rId3" cstate="print">
             <a:grayscl/>
             <a:extLst>
               <a:ext uri="{BEBA8EAE-BF5A-486C-A8C5-ECC9F3942E4B}">
                 <a14:imgProps xmlns:a14="http://schemas.microsoft.com/office/drawing/2010/main">
-                  <a14:imgLayer r:embed="rId5">
+                  <a14:imgLayer r:embed="rId4">
                     <a14:imgEffect>
                       <a14:backgroundRemoval t="3008" b="96241" l="4478" r="96269">
                         <a14:foregroundMark x1="28358" y1="14286" x2="32836" y2="17293"/>
@@ -7564,7 +7564,7 @@
           <p:nvPr/>
         </p:nvPicPr>
         <p:blipFill>
-          <a:blip r:embed="rId6">
+          <a:blip r:embed="rId5">
             <a:extLst>
               <a:ext uri="{28A0092B-C50C-407E-A947-70E740481C1C}">
                 <a14:useLocalDpi xmlns:a14="http://schemas.microsoft.com/office/drawing/2010/main" val="0"/>
@@ -7600,7 +7600,7 @@
           <p:nvPr/>
         </p:nvPicPr>
         <p:blipFill>
-          <a:blip r:embed="rId7">
+          <a:blip r:embed="rId6">
             <a:extLst>
               <a:ext uri="{28A0092B-C50C-407E-A947-70E740481C1C}">
                 <a14:useLocalDpi xmlns:a14="http://schemas.microsoft.com/office/drawing/2010/main" val="0"/>
@@ -8072,10 +8072,10 @@
             </a:pathLst>
           </a:custGeom>
           <a:blipFill>
-            <a:blip r:embed="rId2">
+            <a:blip>
               <a:extLst>
                 <a:ext uri="{96DAC541-7B7A-43D3-8B79-37D633B846F1}">
-                  <asvg:svgBlip xmlns:asvg="http://schemas.microsoft.com/office/drawing/2016/SVG/main" r:embed="rId3"/>
+                  <asvg:svgBlip xmlns:asvg="http://schemas.microsoft.com/office/drawing/2016/SVG/main" r:embed="rId2"/>
                 </a:ext>
               </a:extLst>
             </a:blip>
@@ -8201,8 +8201,8 @@
         </p:nvSpPr>
         <p:spPr>
           <a:xfrm>
-            <a:off x="1141532" y="1936722"/>
-            <a:ext cx="4463930" cy="1914370"/>
+            <a:off x="3410981" y="274629"/>
+            <a:ext cx="11466037" cy="957185"/>
           </a:xfrm>
           <a:prstGeom prst="rect">
             <a:avLst/>
@@ -8214,7 +8214,7 @@
           </a:bodyPr>
           <a:lstStyle/>
           <a:p>
-            <a:pPr marL="0" marR="0" lvl="0" indent="0" algn="l" defTabSz="914400" rtl="0" eaLnBrk="1" fontAlgn="auto" latinLnBrk="0" hangingPunct="1">
+            <a:pPr marL="0" marR="0" lvl="0" indent="0" algn="ctr" defTabSz="914400" rtl="0" eaLnBrk="1" fontAlgn="auto" latinLnBrk="0" hangingPunct="1">
               <a:lnSpc>
                 <a:spcPct val="100000"/>
               </a:lnSpc>
@@ -8249,40 +8249,24 @@
               </a:rPr>
               <a:t>Rezultati</a:t>
             </a:r>
-            <a:endParaRPr kumimoji="0" lang="en-US" sz="6220" b="0" i="0" u="none" strike="noStrike" kern="1200" cap="none" spc="-347" normalizeH="0" baseline="0" noProof="0" dirty="0">
-              <a:ln>
-                <a:noFill/>
-              </a:ln>
-              <a:solidFill>
-                <a:srgbClr val="EBF5FE"/>
-              </a:solidFill>
-              <a:effectLst/>
-              <a:uLnTx/>
-              <a:uFillTx/>
-              <a:latin typeface="Garet"/>
-              <a:ea typeface="Garet"/>
-              <a:cs typeface="Garet"/>
-              <a:sym typeface="Garet"/>
-            </a:endParaRPr>
-          </a:p>
-          <a:p>
-            <a:pPr marL="0" marR="0" lvl="0" indent="0" algn="l" defTabSz="914400" rtl="0" eaLnBrk="1" fontAlgn="auto" latinLnBrk="0" hangingPunct="1">
-              <a:lnSpc>
-                <a:spcPct val="100000"/>
-              </a:lnSpc>
-              <a:spcBef>
-                <a:spcPct val="0"/>
-              </a:spcBef>
-              <a:spcAft>
-                <a:spcPts val="0"/>
-              </a:spcAft>
-              <a:buClrTx/>
-              <a:buSzTx/>
-              <a:buFontTx/>
-              <a:buNone/>
-              <a:tabLst/>
-              <a:defRPr/>
-            </a:pPr>
+            <a:r>
+              <a:rPr kumimoji="0" lang="en-US" sz="6220" b="0" i="0" u="none" strike="noStrike" kern="1200" cap="none" spc="-347" normalizeH="0" baseline="0" noProof="0" dirty="0">
+                <a:ln>
+                  <a:noFill/>
+                </a:ln>
+                <a:solidFill>
+                  <a:srgbClr val="EBF5FE"/>
+                </a:solidFill>
+                <a:effectLst/>
+                <a:uLnTx/>
+                <a:uFillTx/>
+                <a:latin typeface="Garet"/>
+                <a:ea typeface="Garet"/>
+                <a:cs typeface="Garet"/>
+                <a:sym typeface="Garet"/>
+              </a:rPr>
+              <a:t> </a:t>
+            </a:r>
             <a:r>
               <a:rPr kumimoji="0" lang="en-US" sz="6220" b="0" i="0" u="none" strike="noStrike" kern="1200" cap="none" spc="-347" normalizeH="0" baseline="0" noProof="0" dirty="0" err="1">
                 <a:ln>
@@ -8336,8 +8320,8 @@
         </p:nvSpPr>
         <p:spPr>
           <a:xfrm>
-            <a:off x="1141532" y="3838730"/>
-            <a:ext cx="5411668" cy="1914370"/>
+            <a:off x="5066565" y="1231814"/>
+            <a:ext cx="8154868" cy="957185"/>
           </a:xfrm>
           <a:prstGeom prst="rect">
             <a:avLst/>
@@ -8349,7 +8333,7 @@
           </a:bodyPr>
           <a:lstStyle/>
           <a:p>
-            <a:pPr marL="0" marR="0" lvl="0" indent="0" algn="l" defTabSz="914400" rtl="0" eaLnBrk="1" fontAlgn="auto" latinLnBrk="0" hangingPunct="1">
+            <a:pPr marL="0" marR="0" lvl="0" indent="0" algn="ctr" defTabSz="914400" rtl="0" eaLnBrk="1" fontAlgn="auto" latinLnBrk="0" hangingPunct="1">
               <a:lnSpc>
                 <a:spcPct val="100000"/>
               </a:lnSpc>
@@ -8382,27 +8366,8 @@
                 <a:cs typeface="Garet Bold"/>
                 <a:sym typeface="Garet Bold"/>
               </a:rPr>
-              <a:t>Kernel</a:t>
-            </a:r>
-          </a:p>
-          <a:p>
-            <a:pPr marL="0" marR="0" lvl="0" indent="0" algn="l" defTabSz="914400" rtl="0" eaLnBrk="1" fontAlgn="auto" latinLnBrk="0" hangingPunct="1">
-              <a:lnSpc>
-                <a:spcPct val="100000"/>
-              </a:lnSpc>
-              <a:spcBef>
-                <a:spcPct val="0"/>
-              </a:spcBef>
-              <a:spcAft>
-                <a:spcPts val="0"/>
-              </a:spcAft>
-              <a:buClrTx/>
-              <a:buSzTx/>
-              <a:buFontTx/>
-              <a:buNone/>
-              <a:tabLst/>
-              <a:defRPr/>
-            </a:pPr>
+              <a:t>Kernel </a:t>
+            </a:r>
             <a:r>
               <a:rPr lang="en-US" sz="6220" b="1" spc="-347" dirty="0" err="1">
                 <a:solidFill>
@@ -8448,12 +8413,12 @@
           <p:nvPr/>
         </p:nvPicPr>
         <p:blipFill>
-          <a:blip r:embed="rId4" cstate="print">
+          <a:blip r:embed="rId3" cstate="print">
             <a:grayscl/>
             <a:extLst>
               <a:ext uri="{BEBA8EAE-BF5A-486C-A8C5-ECC9F3942E4B}">
                 <a14:imgProps xmlns:a14="http://schemas.microsoft.com/office/drawing/2010/main">
-                  <a14:imgLayer r:embed="rId5">
+                  <a14:imgLayer r:embed="rId4">
                     <a14:imgEffect>
                       <a14:backgroundRemoval t="3008" b="96241" l="4478" r="96269">
                         <a14:foregroundMark x1="28358" y1="14286" x2="32836" y2="17293"/>
@@ -8514,7 +8479,7 @@
         </p:nvSpPr>
         <p:spPr>
           <a:xfrm>
-            <a:off x="285728" y="8979813"/>
+            <a:off x="787720" y="2574125"/>
             <a:ext cx="6724672" cy="430887"/>
           </a:xfrm>
           <a:prstGeom prst="rect">
@@ -8630,7 +8595,7 @@
         </p:nvSpPr>
         <p:spPr>
           <a:xfrm>
-            <a:off x="8450918" y="8979813"/>
+            <a:off x="787719" y="5501662"/>
             <a:ext cx="6724672" cy="430887"/>
           </a:xfrm>
           <a:prstGeom prst="rect">
@@ -8712,7 +8677,7 @@
                 <a:cs typeface="Garet"/>
                 <a:sym typeface="Garet"/>
               </a:rPr>
-              <a:t>sudo dmesg | tail -n 50</a:t>
+              <a:t>sudo dmesg</a:t>
             </a:r>
             <a:endParaRPr kumimoji="0" lang="en-US" sz="2800" b="0" i="1" u="none" strike="noStrike" kern="1200" cap="none" spc="-78" normalizeH="0" baseline="0" noProof="0" dirty="0">
               <a:ln>
@@ -8734,10 +8699,10 @@
       </p:sp>
       <p:pic>
         <p:nvPicPr>
-          <p:cNvPr id="10" name="Picture 9">
+          <p:cNvPr id="7" name="Picture 6">
             <a:extLst>
               <a:ext uri="{FF2B5EF4-FFF2-40B4-BE49-F238E27FC236}">
-                <a16:creationId xmlns:a16="http://schemas.microsoft.com/office/drawing/2014/main" id="{D2F3457D-3DAE-59EB-9BC3-F7C3F0755344}"/>
+                <a16:creationId xmlns:a16="http://schemas.microsoft.com/office/drawing/2014/main" id="{AD6E5344-31ED-9059-5875-642A66D833AC}"/>
               </a:ext>
             </a:extLst>
           </p:cNvPr>
@@ -8747,21 +8712,15 @@
           <p:nvPr/>
         </p:nvPicPr>
         <p:blipFill>
-          <a:blip r:embed="rId6">
-            <a:extLst>
-              <a:ext uri="{28A0092B-C50C-407E-A947-70E740481C1C}">
-                <a14:useLocalDpi xmlns:a14="http://schemas.microsoft.com/office/drawing/2010/main" val="0"/>
-              </a:ext>
-            </a:extLst>
-          </a:blip>
+          <a:blip r:embed="rId5"/>
           <a:stretch>
             <a:fillRect/>
           </a:stretch>
         </p:blipFill>
         <p:spPr>
           <a:xfrm>
-            <a:off x="285728" y="7206469"/>
-            <a:ext cx="7781925" cy="1466850"/>
+            <a:off x="787719" y="3287137"/>
+            <a:ext cx="15012825" cy="1856363"/>
           </a:xfrm>
           <a:prstGeom prst="rect">
             <a:avLst/>
@@ -8770,10 +8729,10 @@
       </p:pic>
       <p:pic>
         <p:nvPicPr>
-          <p:cNvPr id="12" name="Picture 11">
+          <p:cNvPr id="16" name="Picture 15">
             <a:extLst>
               <a:ext uri="{FF2B5EF4-FFF2-40B4-BE49-F238E27FC236}">
-                <a16:creationId xmlns:a16="http://schemas.microsoft.com/office/drawing/2014/main" id="{CC60A151-0D87-D540-A410-B3ED8439A208}"/>
+                <a16:creationId xmlns:a16="http://schemas.microsoft.com/office/drawing/2014/main" id="{68907BDC-F31C-1C3C-E5A7-DABF67EB236A}"/>
               </a:ext>
             </a:extLst>
           </p:cNvPr>
@@ -8783,21 +8742,15 @@
           <p:nvPr/>
         </p:nvPicPr>
         <p:blipFill>
-          <a:blip r:embed="rId7">
-            <a:extLst>
-              <a:ext uri="{28A0092B-C50C-407E-A947-70E740481C1C}">
-                <a14:useLocalDpi xmlns:a14="http://schemas.microsoft.com/office/drawing/2010/main" val="0"/>
-              </a:ext>
-            </a:extLst>
-          </a:blip>
+          <a:blip r:embed="rId6"/>
           <a:stretch>
             <a:fillRect/>
           </a:stretch>
         </p:blipFill>
         <p:spPr>
           <a:xfrm>
-            <a:off x="8450918" y="491344"/>
-            <a:ext cx="9296400" cy="8181975"/>
+            <a:off x="800229" y="6241638"/>
+            <a:ext cx="10868797" cy="3606092"/>
           </a:xfrm>
           <a:prstGeom prst="rect">
             <a:avLst/>
@@ -8893,10 +8846,10 @@
             </a:pathLst>
           </a:custGeom>
           <a:blipFill>
-            <a:blip r:embed="rId2">
+            <a:blip>
               <a:extLst>
                 <a:ext uri="{96DAC541-7B7A-43D3-8B79-37D633B846F1}">
-                  <asvg:svgBlip xmlns:asvg="http://schemas.microsoft.com/office/drawing/2016/SVG/main" r:embed="rId3"/>
+                  <asvg:svgBlip xmlns:asvg="http://schemas.microsoft.com/office/drawing/2016/SVG/main" r:embed="rId2"/>
                 </a:ext>
               </a:extLst>
             </a:blip>
@@ -8952,11 +8905,11 @@
             </a:pathLst>
           </a:custGeom>
           <a:blipFill>
-            <a:blip r:embed="rId4">
+            <a:blip>
               <a:alphaModFix amt="48000"/>
               <a:extLst>
                 <a:ext uri="{96DAC541-7B7A-43D3-8B79-37D633B846F1}">
-                  <asvg:svgBlip xmlns:asvg="http://schemas.microsoft.com/office/drawing/2016/SVG/main" r:embed="rId5"/>
+                  <asvg:svgBlip xmlns:asvg="http://schemas.microsoft.com/office/drawing/2016/SVG/main" r:embed="rId3"/>
                 </a:ext>
               </a:extLst>
             </a:blip>
@@ -10006,12 +9959,12 @@
           <p:nvPr/>
         </p:nvPicPr>
         <p:blipFill>
-          <a:blip r:embed="rId6" cstate="print">
+          <a:blip r:embed="rId4" cstate="print">
             <a:grayscl/>
             <a:extLst>
               <a:ext uri="{BEBA8EAE-BF5A-486C-A8C5-ECC9F3942E4B}">
                 <a14:imgProps xmlns:a14="http://schemas.microsoft.com/office/drawing/2010/main">
-                  <a14:imgLayer r:embed="rId7">
+                  <a14:imgLayer r:embed="rId5">
                     <a14:imgEffect>
                       <a14:backgroundRemoval t="3008" b="96241" l="4478" r="96269">
                         <a14:foregroundMark x1="28358" y1="14286" x2="32836" y2="17293"/>
@@ -10073,7 +10026,7 @@
           <p:nvPr/>
         </p:nvPicPr>
         <p:blipFill>
-          <a:blip r:embed="rId8">
+          <a:blip r:embed="rId6">
             <a:extLst>
               <a:ext uri="{28A0092B-C50C-407E-A947-70E740481C1C}">
                 <a14:useLocalDpi xmlns:a14="http://schemas.microsoft.com/office/drawing/2010/main" val="0"/>
@@ -10190,10 +10143,10 @@
             </a:pathLst>
           </a:custGeom>
           <a:blipFill>
-            <a:blip r:embed="rId2">
+            <a:blip>
               <a:extLst>
                 <a:ext uri="{96DAC541-7B7A-43D3-8B79-37D633B846F1}">
-                  <asvg:svgBlip xmlns:asvg="http://schemas.microsoft.com/office/drawing/2016/SVG/main" r:embed="rId3"/>
+                  <asvg:svgBlip xmlns:asvg="http://schemas.microsoft.com/office/drawing/2016/SVG/main" r:embed="rId2"/>
                 </a:ext>
               </a:extLst>
             </a:blip>
@@ -10285,11 +10238,11 @@
             </a:pathLst>
           </a:custGeom>
           <a:blipFill>
-            <a:blip r:embed="rId4">
+            <a:blip>
               <a:alphaModFix amt="48000"/>
               <a:extLst>
                 <a:ext uri="{96DAC541-7B7A-43D3-8B79-37D633B846F1}">
-                  <asvg:svgBlip xmlns:asvg="http://schemas.microsoft.com/office/drawing/2016/SVG/main" r:embed="rId5"/>
+                  <asvg:svgBlip xmlns:asvg="http://schemas.microsoft.com/office/drawing/2016/SVG/main" r:embed="rId3"/>
                 </a:ext>
               </a:extLst>
             </a:blip>
@@ -13417,12 +13370,12 @@
           <p:nvPr/>
         </p:nvPicPr>
         <p:blipFill>
-          <a:blip r:embed="rId6" cstate="print">
+          <a:blip r:embed="rId4" cstate="print">
             <a:grayscl/>
             <a:extLst>
               <a:ext uri="{BEBA8EAE-BF5A-486C-A8C5-ECC9F3942E4B}">
                 <a14:imgProps xmlns:a14="http://schemas.microsoft.com/office/drawing/2010/main">
-                  <a14:imgLayer r:embed="rId7">
+                  <a14:imgLayer r:embed="rId5">
                     <a14:imgEffect>
                       <a14:backgroundRemoval t="3008" b="96241" l="4478" r="96269">
                         <a14:foregroundMark x1="28358" y1="14286" x2="32836" y2="17293"/>
@@ -13955,10 +13908,10 @@
             </a:pathLst>
           </a:custGeom>
           <a:blipFill>
-            <a:blip r:embed="rId2">
+            <a:blip>
               <a:extLst>
                 <a:ext uri="{96DAC541-7B7A-43D3-8B79-37D633B846F1}">
-                  <asvg:svgBlip xmlns:asvg="http://schemas.microsoft.com/office/drawing/2016/SVG/main" r:embed="rId3"/>
+                  <asvg:svgBlip xmlns:asvg="http://schemas.microsoft.com/office/drawing/2016/SVG/main" r:embed="rId2"/>
                 </a:ext>
               </a:extLst>
             </a:blip>
@@ -14014,11 +13967,11 @@
             </a:pathLst>
           </a:custGeom>
           <a:blipFill>
-            <a:blip r:embed="rId4">
+            <a:blip>
               <a:alphaModFix amt="48000"/>
               <a:extLst>
                 <a:ext uri="{96DAC541-7B7A-43D3-8B79-37D633B846F1}">
-                  <asvg:svgBlip xmlns:asvg="http://schemas.microsoft.com/office/drawing/2016/SVG/main" r:embed="rId5"/>
+                  <asvg:svgBlip xmlns:asvg="http://schemas.microsoft.com/office/drawing/2016/SVG/main" r:embed="rId3"/>
                 </a:ext>
               </a:extLst>
             </a:blip>
@@ -14074,11 +14027,11 @@
             </a:pathLst>
           </a:custGeom>
           <a:blipFill>
-            <a:blip r:embed="rId4">
+            <a:blip>
               <a:alphaModFix amt="40000"/>
               <a:extLst>
                 <a:ext uri="{96DAC541-7B7A-43D3-8B79-37D633B846F1}">
-                  <asvg:svgBlip xmlns:asvg="http://schemas.microsoft.com/office/drawing/2016/SVG/main" r:embed="rId5"/>
+                  <asvg:svgBlip xmlns:asvg="http://schemas.microsoft.com/office/drawing/2016/SVG/main" r:embed="rId3"/>
                 </a:ext>
               </a:extLst>
             </a:blip>
@@ -14134,10 +14087,10 @@
             </a:pathLst>
           </a:custGeom>
           <a:blipFill>
-            <a:blip r:embed="rId6">
+            <a:blip>
               <a:extLst>
                 <a:ext uri="{96DAC541-7B7A-43D3-8B79-37D633B846F1}">
-                  <asvg:svgBlip xmlns:asvg="http://schemas.microsoft.com/office/drawing/2016/SVG/main" r:embed="rId7"/>
+                  <asvg:svgBlip xmlns:asvg="http://schemas.microsoft.com/office/drawing/2016/SVG/main" r:embed="rId4"/>
                 </a:ext>
               </a:extLst>
             </a:blip>
@@ -15458,10 +15411,10 @@
             </a:pathLst>
           </a:custGeom>
           <a:blipFill>
-            <a:blip r:embed="rId6">
+            <a:blip>
               <a:extLst>
                 <a:ext uri="{96DAC541-7B7A-43D3-8B79-37D633B846F1}">
-                  <asvg:svgBlip xmlns:asvg="http://schemas.microsoft.com/office/drawing/2016/SVG/main" r:embed="rId7"/>
+                  <asvg:svgBlip xmlns:asvg="http://schemas.microsoft.com/office/drawing/2016/SVG/main" r:embed="rId4"/>
                 </a:ext>
               </a:extLst>
             </a:blip>
@@ -15493,12 +15446,12 @@
           <p:nvPr/>
         </p:nvPicPr>
         <p:blipFill>
-          <a:blip r:embed="rId8" cstate="print">
+          <a:blip r:embed="rId5" cstate="print">
             <a:grayscl/>
             <a:extLst>
               <a:ext uri="{BEBA8EAE-BF5A-486C-A8C5-ECC9F3942E4B}">
                 <a14:imgProps xmlns:a14="http://schemas.microsoft.com/office/drawing/2010/main">
-                  <a14:imgLayer r:embed="rId9">
+                  <a14:imgLayer r:embed="rId6">
                     <a14:imgEffect>
                       <a14:backgroundRemoval t="3008" b="96241" l="4478" r="96269">
                         <a14:foregroundMark x1="28358" y1="14286" x2="32836" y2="17293"/>
@@ -15629,10 +15582,10 @@
             </a:pathLst>
           </a:custGeom>
           <a:blipFill>
-            <a:blip r:embed="rId2">
+            <a:blip>
               <a:extLst>
                 <a:ext uri="{96DAC541-7B7A-43D3-8B79-37D633B846F1}">
-                  <asvg:svgBlip xmlns:asvg="http://schemas.microsoft.com/office/drawing/2016/SVG/main" r:embed="rId3"/>
+                  <asvg:svgBlip xmlns:asvg="http://schemas.microsoft.com/office/drawing/2016/SVG/main" r:embed="rId2"/>
                 </a:ext>
               </a:extLst>
             </a:blip>
@@ -15688,10 +15641,10 @@
             </a:pathLst>
           </a:custGeom>
           <a:blipFill>
-            <a:blip r:embed="rId4">
+            <a:blip>
               <a:extLst>
                 <a:ext uri="{96DAC541-7B7A-43D3-8B79-37D633B846F1}">
-                  <asvg:svgBlip xmlns:asvg="http://schemas.microsoft.com/office/drawing/2016/SVG/main" r:embed="rId5"/>
+                  <asvg:svgBlip xmlns:asvg="http://schemas.microsoft.com/office/drawing/2016/SVG/main" r:embed="rId3"/>
                 </a:ext>
               </a:extLst>
             </a:blip>
@@ -15747,11 +15700,11 @@
             </a:pathLst>
           </a:custGeom>
           <a:blipFill>
-            <a:blip r:embed="rId6">
+            <a:blip>
               <a:alphaModFix amt="48000"/>
               <a:extLst>
                 <a:ext uri="{96DAC541-7B7A-43D3-8B79-37D633B846F1}">
-                  <asvg:svgBlip xmlns:asvg="http://schemas.microsoft.com/office/drawing/2016/SVG/main" r:embed="rId7"/>
+                  <asvg:svgBlip xmlns:asvg="http://schemas.microsoft.com/office/drawing/2016/SVG/main" r:embed="rId4"/>
                 </a:ext>
               </a:extLst>
             </a:blip>
@@ -15807,10 +15760,10 @@
             </a:pathLst>
           </a:custGeom>
           <a:blipFill>
-            <a:blip r:embed="rId8">
+            <a:blip>
               <a:extLst>
                 <a:ext uri="{96DAC541-7B7A-43D3-8B79-37D633B846F1}">
-                  <asvg:svgBlip xmlns:asvg="http://schemas.microsoft.com/office/drawing/2016/SVG/main" r:embed="rId9"/>
+                  <asvg:svgBlip xmlns:asvg="http://schemas.microsoft.com/office/drawing/2016/SVG/main" r:embed="rId5"/>
                 </a:ext>
               </a:extLst>
             </a:blip>
@@ -16067,10 +16020,10 @@
             </a:pathLst>
           </a:custGeom>
           <a:blipFill>
-            <a:blip r:embed="rId8">
+            <a:blip>
               <a:extLst>
                 <a:ext uri="{96DAC541-7B7A-43D3-8B79-37D633B846F1}">
-                  <asvg:svgBlip xmlns:asvg="http://schemas.microsoft.com/office/drawing/2016/SVG/main" r:embed="rId9"/>
+                  <asvg:svgBlip xmlns:asvg="http://schemas.microsoft.com/office/drawing/2016/SVG/main" r:embed="rId5"/>
                 </a:ext>
               </a:extLst>
             </a:blip>
@@ -17165,12 +17118,12 @@
           <p:nvPr/>
         </p:nvPicPr>
         <p:blipFill>
-          <a:blip r:embed="rId10" cstate="print">
+          <a:blip r:embed="rId6" cstate="print">
             <a:grayscl/>
             <a:extLst>
               <a:ext uri="{BEBA8EAE-BF5A-486C-A8C5-ECC9F3942E4B}">
                 <a14:imgProps xmlns:a14="http://schemas.microsoft.com/office/drawing/2010/main">
-                  <a14:imgLayer r:embed="rId11">
+                  <a14:imgLayer r:embed="rId7">
                     <a14:imgEffect>
                       <a14:backgroundRemoval t="3008" b="96241" l="4478" r="96269">
                         <a14:foregroundMark x1="28358" y1="14286" x2="32836" y2="17293"/>
@@ -17417,10 +17370,10 @@
             </a:pathLst>
           </a:custGeom>
           <a:blipFill>
-            <a:blip r:embed="rId2">
+            <a:blip>
               <a:extLst>
                 <a:ext uri="{96DAC541-7B7A-43D3-8B79-37D633B846F1}">
-                  <asvg:svgBlip xmlns:asvg="http://schemas.microsoft.com/office/drawing/2016/SVG/main" r:embed="rId3"/>
+                  <asvg:svgBlip xmlns:asvg="http://schemas.microsoft.com/office/drawing/2016/SVG/main" r:embed="rId2"/>
                 </a:ext>
               </a:extLst>
             </a:blip>
@@ -19130,12 +19083,12 @@
           <p:nvPr/>
         </p:nvPicPr>
         <p:blipFill>
-          <a:blip r:embed="rId4" cstate="print">
+          <a:blip r:embed="rId3" cstate="print">
             <a:grayscl/>
             <a:extLst>
               <a:ext uri="{BEBA8EAE-BF5A-486C-A8C5-ECC9F3942E4B}">
                 <a14:imgProps xmlns:a14="http://schemas.microsoft.com/office/drawing/2010/main">
-                  <a14:imgLayer r:embed="rId5">
+                  <a14:imgLayer r:embed="rId4">
                     <a14:imgEffect>
                       <a14:backgroundRemoval t="3008" b="96241" l="4478" r="96269">
                         <a14:foregroundMark x1="28358" y1="14286" x2="32836" y2="17293"/>
@@ -19197,7 +19150,7 @@
           <p:nvPr/>
         </p:nvPicPr>
         <p:blipFill>
-          <a:blip r:embed="rId6">
+          <a:blip r:embed="rId5">
             <a:extLst>
               <a:ext uri="{28A0092B-C50C-407E-A947-70E740481C1C}">
                 <a14:useLocalDpi xmlns:a14="http://schemas.microsoft.com/office/drawing/2010/main" val="0"/>
@@ -19302,10 +19255,10 @@
             </a:pathLst>
           </a:custGeom>
           <a:blipFill>
-            <a:blip r:embed="rId2">
+            <a:blip>
               <a:extLst>
                 <a:ext uri="{96DAC541-7B7A-43D3-8B79-37D633B846F1}">
-                  <asvg:svgBlip xmlns:asvg="http://schemas.microsoft.com/office/drawing/2016/SVG/main" r:embed="rId3"/>
+                  <asvg:svgBlip xmlns:asvg="http://schemas.microsoft.com/office/drawing/2016/SVG/main" r:embed="rId2"/>
                 </a:ext>
               </a:extLst>
             </a:blip>
@@ -19361,11 +19314,11 @@
             </a:pathLst>
           </a:custGeom>
           <a:blipFill>
-            <a:blip r:embed="rId4">
+            <a:blip>
               <a:alphaModFix amt="48000"/>
               <a:extLst>
                 <a:ext uri="{96DAC541-7B7A-43D3-8B79-37D633B846F1}">
-                  <asvg:svgBlip xmlns:asvg="http://schemas.microsoft.com/office/drawing/2016/SVG/main" r:embed="rId5"/>
+                  <asvg:svgBlip xmlns:asvg="http://schemas.microsoft.com/office/drawing/2016/SVG/main" r:embed="rId3"/>
                 </a:ext>
               </a:extLst>
             </a:blip>
@@ -19421,10 +19374,10 @@
             </a:pathLst>
           </a:custGeom>
           <a:blipFill>
-            <a:blip r:embed="rId6">
+            <a:blip>
               <a:extLst>
                 <a:ext uri="{96DAC541-7B7A-43D3-8B79-37D633B846F1}">
-                  <asvg:svgBlip xmlns:asvg="http://schemas.microsoft.com/office/drawing/2016/SVG/main" r:embed="rId7"/>
+                  <asvg:svgBlip xmlns:asvg="http://schemas.microsoft.com/office/drawing/2016/SVG/main" r:embed="rId4"/>
                 </a:ext>
               </a:extLst>
             </a:blip>
@@ -19693,10 +19646,10 @@
             </a:pathLst>
           </a:custGeom>
           <a:blipFill>
-            <a:blip r:embed="rId6">
+            <a:blip>
               <a:extLst>
                 <a:ext uri="{96DAC541-7B7A-43D3-8B79-37D633B846F1}">
-                  <asvg:svgBlip xmlns:asvg="http://schemas.microsoft.com/office/drawing/2016/SVG/main" r:embed="rId7"/>
+                  <asvg:svgBlip xmlns:asvg="http://schemas.microsoft.com/office/drawing/2016/SVG/main" r:embed="rId4"/>
                 </a:ext>
               </a:extLst>
             </a:blip>
@@ -21012,12 +20965,12 @@
           <p:nvPr/>
         </p:nvPicPr>
         <p:blipFill>
-          <a:blip r:embed="rId8" cstate="print">
+          <a:blip r:embed="rId5" cstate="print">
             <a:grayscl/>
             <a:extLst>
               <a:ext uri="{BEBA8EAE-BF5A-486C-A8C5-ECC9F3942E4B}">
                 <a14:imgProps xmlns:a14="http://schemas.microsoft.com/office/drawing/2010/main">
-                  <a14:imgLayer r:embed="rId9">
+                  <a14:imgLayer r:embed="rId6">
                     <a14:imgEffect>
                       <a14:backgroundRemoval t="3008" b="96241" l="4478" r="96269">
                         <a14:foregroundMark x1="28358" y1="14286" x2="32836" y2="17293"/>
@@ -21117,7 +21070,7 @@
         </p:nvGrpSpPr>
         <p:grpSpPr>
           <a:xfrm rot="10517729">
-            <a:off x="-2903692" y="-84714"/>
+            <a:off x="-2903692" y="2728"/>
             <a:ext cx="10371714" cy="10371714"/>
             <a:chOff x="0" y="0"/>
             <a:chExt cx="812800" cy="812800"/>
@@ -21264,10 +21217,10 @@
             </a:pathLst>
           </a:custGeom>
           <a:blipFill>
-            <a:blip r:embed="rId2">
+            <a:blip>
               <a:extLst>
                 <a:ext uri="{96DAC541-7B7A-43D3-8B79-37D633B846F1}">
-                  <asvg:svgBlip xmlns:asvg="http://schemas.microsoft.com/office/drawing/2016/SVG/main" r:embed="rId3"/>
+                  <asvg:svgBlip xmlns:asvg="http://schemas.microsoft.com/office/drawing/2016/SVG/main" r:embed="rId2"/>
                 </a:ext>
               </a:extLst>
             </a:blip>
@@ -21292,7 +21245,7 @@
         </p:nvSpPr>
         <p:spPr>
           <a:xfrm>
-            <a:off x="931945" y="3009900"/>
+            <a:off x="931945" y="3097342"/>
             <a:ext cx="3696124" cy="6313254"/>
           </a:xfrm>
           <a:custGeom>
@@ -21323,10 +21276,10 @@
             </a:pathLst>
           </a:custGeom>
           <a:blipFill>
-            <a:blip r:embed="rId4">
+            <a:blip>
               <a:extLst>
                 <a:ext uri="{96DAC541-7B7A-43D3-8B79-37D633B846F1}">
-                  <asvg:svgBlip xmlns:asvg="http://schemas.microsoft.com/office/drawing/2016/SVG/main" r:embed="rId5"/>
+                  <asvg:svgBlip xmlns:asvg="http://schemas.microsoft.com/office/drawing/2016/SVG/main" r:embed="rId3"/>
                 </a:ext>
               </a:extLst>
             </a:blip>
@@ -21351,7 +21304,7 @@
         </p:nvSpPr>
         <p:spPr>
           <a:xfrm>
-            <a:off x="381000" y="4434756"/>
+            <a:off x="381000" y="4522198"/>
             <a:ext cx="2827990" cy="4114800"/>
           </a:xfrm>
           <a:custGeom>
@@ -21382,10 +21335,10 @@
             </a:pathLst>
           </a:custGeom>
           <a:blipFill>
-            <a:blip r:embed="rId6">
+            <a:blip>
               <a:extLst>
                 <a:ext uri="{96DAC541-7B7A-43D3-8B79-37D633B846F1}">
-                  <asvg:svgBlip xmlns:asvg="http://schemas.microsoft.com/office/drawing/2016/SVG/main" r:embed="rId7"/>
+                  <asvg:svgBlip xmlns:asvg="http://schemas.microsoft.com/office/drawing/2016/SVG/main" r:embed="rId4"/>
                 </a:ext>
               </a:extLst>
             </a:blip>
@@ -21454,8 +21407,8 @@
         </p:nvSpPr>
         <p:spPr>
           <a:xfrm>
-            <a:off x="5105400" y="571500"/>
-            <a:ext cx="8589421" cy="2618153"/>
+            <a:off x="2590800" y="760494"/>
+            <a:ext cx="12496800" cy="1258806"/>
           </a:xfrm>
           <a:prstGeom prst="rect">
             <a:avLst/>
@@ -21531,15 +21484,15 @@
         </p:nvSpPr>
         <p:spPr>
           <a:xfrm>
-            <a:off x="8071952" y="1890903"/>
-            <a:ext cx="8002468" cy="1293313"/>
+            <a:off x="13868400" y="708049"/>
+            <a:ext cx="4301612" cy="1293313"/>
           </a:xfrm>
           <a:prstGeom prst="rect">
             <a:avLst/>
           </a:prstGeom>
         </p:spPr>
         <p:txBody>
-          <a:bodyPr lIns="0" tIns="0" rIns="0" bIns="0" rtlCol="0" anchor="t">
+          <a:bodyPr wrap="square" lIns="0" tIns="0" rIns="0" bIns="0" rtlCol="0" anchor="t">
             <a:spAutoFit/>
           </a:bodyPr>
           <a:lstStyle/>
@@ -21582,12 +21535,12 @@
           <p:nvPr/>
         </p:nvPicPr>
         <p:blipFill>
-          <a:blip r:embed="rId8" cstate="print">
+          <a:blip r:embed="rId5" cstate="print">
             <a:grayscl/>
             <a:extLst>
               <a:ext uri="{BEBA8EAE-BF5A-486C-A8C5-ECC9F3942E4B}">
                 <a14:imgProps xmlns:a14="http://schemas.microsoft.com/office/drawing/2010/main">
-                  <a14:imgLayer r:embed="rId9">
+                  <a14:imgLayer r:embed="rId6">
                     <a14:imgEffect>
                       <a14:backgroundRemoval t="3008" b="96241" l="4478" r="96269">
                         <a14:foregroundMark x1="28358" y1="14286" x2="32836" y2="17293"/>
@@ -21648,8 +21601,8 @@
         </p:nvSpPr>
         <p:spPr>
           <a:xfrm>
-            <a:off x="5105400" y="3506256"/>
-            <a:ext cx="10964960" cy="6463308"/>
+            <a:off x="4769221" y="2646189"/>
+            <a:ext cx="12015070" cy="7325082"/>
           </a:xfrm>
           <a:prstGeom prst="rect">
             <a:avLst/>
@@ -21661,12 +21614,26 @@
           </a:bodyPr>
           <a:lstStyle/>
           <a:p>
-            <a:pPr>
+            <a:pPr marL="457200" indent="-457200">
               <a:spcBef>
                 <a:spcPct val="0"/>
               </a:spcBef>
+              <a:buFont typeface="Arial" panose="020B0604020202020204" pitchFamily="34" charset="0"/>
+              <a:buChar char="•"/>
             </a:pPr>
             <a:r>
+              <a:rPr lang="en-US" sz="2800" b="1" spc="-78" dirty="0">
+                <a:solidFill>
+                  <a:srgbClr val="EBF5FE"/>
+                </a:solidFill>
+                <a:latin typeface="Garet"/>
+                <a:ea typeface="Garet"/>
+                <a:cs typeface="Garet"/>
+                <a:sym typeface="Garet"/>
+              </a:rPr>
+              <a:t>Dinamičko </a:t>
+            </a:r>
+            <a:r>
               <a:rPr lang="en-US" sz="2800" b="1" spc="-78" dirty="0" err="1">
                 <a:solidFill>
                   <a:srgbClr val="EBF5FE"/>
@@ -21676,7 +21643,7 @@
                 <a:cs typeface="Garet"/>
                 <a:sym typeface="Garet"/>
               </a:rPr>
-              <a:t>Dinamičko</a:t>
+              <a:t>proširenje</a:t>
             </a:r>
             <a:r>
               <a:rPr lang="en-US" sz="2800" b="1" spc="-78" dirty="0">
@@ -21688,10 +21655,46 @@
                 <a:cs typeface="Garet"/>
                 <a:sym typeface="Garet"/>
               </a:rPr>
-              <a:t> </a:t>
-            </a:r>
-            <a:r>
-              <a:rPr lang="en-US" sz="2800" b="1" spc="-78" dirty="0" err="1">
+              <a:t>: </a:t>
+            </a:r>
+            <a:r>
+              <a:rPr lang="en-US" sz="2800" spc="-78" dirty="0">
+                <a:solidFill>
+                  <a:srgbClr val="EBF5FE"/>
+                </a:solidFill>
+                <a:latin typeface="Garet"/>
+                <a:ea typeface="Garet"/>
+                <a:cs typeface="Garet"/>
+                <a:sym typeface="Garet"/>
+              </a:rPr>
+              <a:t>Modul </a:t>
+            </a:r>
+            <a:r>
+              <a:rPr lang="en-US" sz="2800" spc="-78" dirty="0" err="1">
+                <a:solidFill>
+                  <a:srgbClr val="EBF5FE"/>
+                </a:solidFill>
+                <a:latin typeface="Garet"/>
+                <a:ea typeface="Garet"/>
+                <a:cs typeface="Garet"/>
+                <a:sym typeface="Garet"/>
+              </a:rPr>
+              <a:t>omogućava</a:t>
+            </a:r>
+            <a:r>
+              <a:rPr lang="en-US" sz="2800" spc="-78" dirty="0">
+                <a:solidFill>
+                  <a:srgbClr val="EBF5FE"/>
+                </a:solidFill>
+                <a:latin typeface="Garet"/>
+                <a:ea typeface="Garet"/>
+                <a:cs typeface="Garet"/>
+                <a:sym typeface="Garet"/>
+              </a:rPr>
+              <a:t> </a:t>
+            </a:r>
+            <a:r>
+              <a:rPr lang="en-US" sz="2800" spc="-78" dirty="0" err="1">
                 <a:solidFill>
                   <a:srgbClr val="EBF5FE"/>
                 </a:solidFill>
@@ -21703,44 +21706,637 @@
               <a:t>proširenje</a:t>
             </a:r>
             <a:r>
-              <a:rPr lang="en-US" sz="2800" b="1" spc="-78" dirty="0">
-                <a:solidFill>
-                  <a:srgbClr val="EBF5FE"/>
-                </a:solidFill>
-                <a:latin typeface="Garet"/>
-                <a:ea typeface="Garet"/>
-                <a:cs typeface="Garet"/>
-                <a:sym typeface="Garet"/>
-              </a:rPr>
-              <a:t>:</a:t>
-            </a:r>
-            <a:endParaRPr lang="sr-Latn-RS" sz="2800" b="1" spc="-78" dirty="0">
-              <a:solidFill>
-                <a:srgbClr val="EBF5FE"/>
-              </a:solidFill>
-              <a:latin typeface="Garet"/>
-              <a:ea typeface="Garet"/>
-              <a:cs typeface="Garet"/>
-              <a:sym typeface="Garet"/>
-            </a:endParaRPr>
+              <a:rPr lang="en-US" sz="2800" spc="-78" dirty="0">
+                <a:solidFill>
+                  <a:srgbClr val="EBF5FE"/>
+                </a:solidFill>
+                <a:latin typeface="Garet"/>
+                <a:ea typeface="Garet"/>
+                <a:cs typeface="Garet"/>
+                <a:sym typeface="Garet"/>
+              </a:rPr>
+              <a:t> </a:t>
+            </a:r>
+            <a:r>
+              <a:rPr lang="en-US" sz="2800" spc="-78" dirty="0" err="1">
+                <a:solidFill>
+                  <a:srgbClr val="EBF5FE"/>
+                </a:solidFill>
+                <a:latin typeface="Garet"/>
+                <a:ea typeface="Garet"/>
+                <a:cs typeface="Garet"/>
+                <a:sym typeface="Garet"/>
+              </a:rPr>
+              <a:t>funkcionalnosti</a:t>
+            </a:r>
+            <a:r>
+              <a:rPr lang="en-US" sz="2800" spc="-78" dirty="0">
+                <a:solidFill>
+                  <a:srgbClr val="EBF5FE"/>
+                </a:solidFill>
+                <a:latin typeface="Garet"/>
+                <a:ea typeface="Garet"/>
+                <a:cs typeface="Garet"/>
+                <a:sym typeface="Garet"/>
+              </a:rPr>
+              <a:t> </a:t>
+            </a:r>
+            <a:r>
+              <a:rPr lang="en-US" sz="2800" spc="-78" dirty="0" err="1">
+                <a:solidFill>
+                  <a:srgbClr val="EBF5FE"/>
+                </a:solidFill>
+                <a:latin typeface="Garet"/>
+                <a:ea typeface="Garet"/>
+                <a:cs typeface="Garet"/>
+                <a:sym typeface="Garet"/>
+              </a:rPr>
+              <a:t>kernela</a:t>
+            </a:r>
+            <a:r>
+              <a:rPr lang="en-US" sz="2800" spc="-78" dirty="0">
+                <a:solidFill>
+                  <a:srgbClr val="EBF5FE"/>
+                </a:solidFill>
+                <a:latin typeface="Garet"/>
+                <a:ea typeface="Garet"/>
+                <a:cs typeface="Garet"/>
+                <a:sym typeface="Garet"/>
+              </a:rPr>
+              <a:t> u </a:t>
+            </a:r>
+            <a:r>
+              <a:rPr lang="en-US" sz="2800" spc="-78" dirty="0" err="1">
+                <a:solidFill>
+                  <a:srgbClr val="EBF5FE"/>
+                </a:solidFill>
+                <a:latin typeface="Garet"/>
+                <a:ea typeface="Garet"/>
+                <a:cs typeface="Garet"/>
+                <a:sym typeface="Garet"/>
+              </a:rPr>
+              <a:t>realnom</a:t>
+            </a:r>
+            <a:r>
+              <a:rPr lang="en-US" sz="2800" spc="-78" dirty="0">
+                <a:solidFill>
+                  <a:srgbClr val="EBF5FE"/>
+                </a:solidFill>
+                <a:latin typeface="Garet"/>
+                <a:ea typeface="Garet"/>
+                <a:cs typeface="Garet"/>
+                <a:sym typeface="Garet"/>
+              </a:rPr>
+              <a:t> </a:t>
+            </a:r>
+            <a:r>
+              <a:rPr lang="en-US" sz="2800" spc="-78" dirty="0" err="1">
+                <a:solidFill>
+                  <a:srgbClr val="EBF5FE"/>
+                </a:solidFill>
+                <a:latin typeface="Garet"/>
+                <a:ea typeface="Garet"/>
+                <a:cs typeface="Garet"/>
+                <a:sym typeface="Garet"/>
+              </a:rPr>
+              <a:t>vremenu</a:t>
+            </a:r>
+            <a:r>
+              <a:rPr lang="en-US" sz="2800" spc="-78" dirty="0">
+                <a:solidFill>
+                  <a:srgbClr val="EBF5FE"/>
+                </a:solidFill>
+                <a:latin typeface="Garet"/>
+                <a:ea typeface="Garet"/>
+                <a:cs typeface="Garet"/>
+                <a:sym typeface="Garet"/>
+              </a:rPr>
+              <a:t>, bez </a:t>
+            </a:r>
+            <a:r>
+              <a:rPr lang="en-US" sz="2800" spc="-78" dirty="0" err="1">
+                <a:solidFill>
+                  <a:srgbClr val="EBF5FE"/>
+                </a:solidFill>
+                <a:latin typeface="Garet"/>
+                <a:ea typeface="Garet"/>
+                <a:cs typeface="Garet"/>
+                <a:sym typeface="Garet"/>
+              </a:rPr>
+              <a:t>potrebe</a:t>
+            </a:r>
+            <a:r>
+              <a:rPr lang="en-US" sz="2800" spc="-78" dirty="0">
+                <a:solidFill>
+                  <a:srgbClr val="EBF5FE"/>
+                </a:solidFill>
+                <a:latin typeface="Garet"/>
+                <a:ea typeface="Garet"/>
+                <a:cs typeface="Garet"/>
+                <a:sym typeface="Garet"/>
+              </a:rPr>
+              <a:t> za </a:t>
+            </a:r>
+            <a:r>
+              <a:rPr lang="en-US" sz="2800" spc="-78" dirty="0" err="1">
+                <a:solidFill>
+                  <a:srgbClr val="EBF5FE"/>
+                </a:solidFill>
+                <a:latin typeface="Garet"/>
+                <a:ea typeface="Garet"/>
+                <a:cs typeface="Garet"/>
+                <a:sym typeface="Garet"/>
+              </a:rPr>
+              <a:t>ponovnim</a:t>
+            </a:r>
+            <a:r>
+              <a:rPr lang="en-US" sz="2800" spc="-78" dirty="0">
+                <a:solidFill>
+                  <a:srgbClr val="EBF5FE"/>
+                </a:solidFill>
+                <a:latin typeface="Garet"/>
+                <a:ea typeface="Garet"/>
+                <a:cs typeface="Garet"/>
+                <a:sym typeface="Garet"/>
+              </a:rPr>
+              <a:t> </a:t>
+            </a:r>
+            <a:r>
+              <a:rPr lang="en-US" sz="2800" spc="-78" dirty="0" err="1">
+                <a:solidFill>
+                  <a:srgbClr val="EBF5FE"/>
+                </a:solidFill>
+                <a:latin typeface="Garet"/>
+                <a:ea typeface="Garet"/>
+                <a:cs typeface="Garet"/>
+                <a:sym typeface="Garet"/>
+              </a:rPr>
+              <a:t>kompajliranjem</a:t>
+            </a:r>
+            <a:r>
+              <a:rPr lang="en-US" sz="2800" spc="-78" dirty="0">
+                <a:solidFill>
+                  <a:srgbClr val="EBF5FE"/>
+                </a:solidFill>
+                <a:latin typeface="Garet"/>
+                <a:ea typeface="Garet"/>
+                <a:cs typeface="Garet"/>
+                <a:sym typeface="Garet"/>
+              </a:rPr>
+              <a:t> </a:t>
+            </a:r>
+            <a:r>
+              <a:rPr lang="en-US" sz="2800" spc="-78" dirty="0" err="1">
+                <a:solidFill>
+                  <a:srgbClr val="EBF5FE"/>
+                </a:solidFill>
+                <a:latin typeface="Garet"/>
+                <a:ea typeface="Garet"/>
+                <a:cs typeface="Garet"/>
+                <a:sym typeface="Garet"/>
+              </a:rPr>
+              <a:t>sistema</a:t>
+            </a:r>
+            <a:r>
+              <a:rPr lang="en-US" sz="2800" spc="-78" dirty="0">
+                <a:solidFill>
+                  <a:srgbClr val="EBF5FE"/>
+                </a:solidFill>
+                <a:latin typeface="Garet"/>
+                <a:ea typeface="Garet"/>
+                <a:cs typeface="Garet"/>
+                <a:sym typeface="Garet"/>
+              </a:rPr>
+              <a:t> </a:t>
+            </a:r>
+            <a:r>
+              <a:rPr lang="en-US" sz="2800" spc="-78" dirty="0" err="1">
+                <a:solidFill>
+                  <a:srgbClr val="EBF5FE"/>
+                </a:solidFill>
+                <a:latin typeface="Garet"/>
+                <a:ea typeface="Garet"/>
+                <a:cs typeface="Garet"/>
+                <a:sym typeface="Garet"/>
+              </a:rPr>
+              <a:t>ili</a:t>
+            </a:r>
+            <a:r>
+              <a:rPr lang="en-US" sz="2800" spc="-78" dirty="0">
+                <a:solidFill>
+                  <a:srgbClr val="EBF5FE"/>
+                </a:solidFill>
+                <a:latin typeface="Garet"/>
+                <a:ea typeface="Garet"/>
+                <a:cs typeface="Garet"/>
+                <a:sym typeface="Garet"/>
+              </a:rPr>
+              <a:t> </a:t>
+            </a:r>
+            <a:r>
+              <a:rPr lang="en-US" sz="2800" spc="-78" dirty="0" err="1">
+                <a:solidFill>
+                  <a:srgbClr val="EBF5FE"/>
+                </a:solidFill>
+                <a:latin typeface="Garet"/>
+                <a:ea typeface="Garet"/>
+                <a:cs typeface="Garet"/>
+                <a:sym typeface="Garet"/>
+              </a:rPr>
+              <a:t>restartovanjem</a:t>
+            </a:r>
+            <a:r>
+              <a:rPr lang="en-US" sz="2800" spc="-78" dirty="0">
+                <a:solidFill>
+                  <a:srgbClr val="EBF5FE"/>
+                </a:solidFill>
+                <a:latin typeface="Garet"/>
+                <a:ea typeface="Garet"/>
+                <a:cs typeface="Garet"/>
+                <a:sym typeface="Garet"/>
+              </a:rPr>
+              <a:t> (reboot).</a:t>
+            </a:r>
           </a:p>
           <a:p>
-            <a:pPr>
+            <a:pPr marL="457200" indent="-457200">
               <a:spcBef>
                 <a:spcPct val="0"/>
               </a:spcBef>
+              <a:buFont typeface="Arial" panose="020B0604020202020204" pitchFamily="34" charset="0"/>
+              <a:buChar char="•"/>
             </a:pPr>
             <a:r>
-              <a:rPr lang="en-US" sz="2800" spc="-78" dirty="0">
-                <a:solidFill>
-                  <a:srgbClr val="EBF5FE"/>
-                </a:solidFill>
-                <a:latin typeface="Garet"/>
-                <a:ea typeface="Garet"/>
-                <a:cs typeface="Garet"/>
-                <a:sym typeface="Garet"/>
-              </a:rPr>
-              <a:t>Modul </a:t>
+              <a:rPr lang="en-US" sz="2800" b="1" spc="-78" dirty="0" err="1">
+                <a:solidFill>
+                  <a:srgbClr val="EBF5FE"/>
+                </a:solidFill>
+                <a:latin typeface="Garet"/>
+                <a:ea typeface="Garet"/>
+                <a:cs typeface="Garet"/>
+                <a:sym typeface="Garet"/>
+              </a:rPr>
+              <a:t>SysFS</a:t>
+            </a:r>
+            <a:r>
+              <a:rPr lang="en-US" sz="2800" b="1" spc="-78" dirty="0">
+                <a:solidFill>
+                  <a:srgbClr val="EBF5FE"/>
+                </a:solidFill>
+                <a:latin typeface="Garet"/>
+                <a:ea typeface="Garet"/>
+                <a:cs typeface="Garet"/>
+                <a:sym typeface="Garet"/>
+              </a:rPr>
+              <a:t> </a:t>
+            </a:r>
+            <a:r>
+              <a:rPr lang="en-US" sz="2800" b="1" spc="-78" dirty="0" err="1">
+                <a:solidFill>
+                  <a:srgbClr val="EBF5FE"/>
+                </a:solidFill>
+                <a:latin typeface="Garet"/>
+                <a:ea typeface="Garet"/>
+                <a:cs typeface="Garet"/>
+                <a:sym typeface="Garet"/>
+              </a:rPr>
+              <a:t>interfejs</a:t>
+            </a:r>
+            <a:r>
+              <a:rPr lang="en-US" sz="2800" b="1" spc="-78" dirty="0">
+                <a:solidFill>
+                  <a:srgbClr val="EBF5FE"/>
+                </a:solidFill>
+                <a:latin typeface="Garet"/>
+                <a:ea typeface="Garet"/>
+                <a:cs typeface="Garet"/>
+                <a:sym typeface="Garet"/>
+              </a:rPr>
+              <a:t> </a:t>
+            </a:r>
+            <a:r>
+              <a:rPr lang="en-US" sz="2800" spc="-78" dirty="0">
+                <a:solidFill>
+                  <a:srgbClr val="EBF5FE"/>
+                </a:solidFill>
+                <a:latin typeface="Garet"/>
+                <a:ea typeface="Garet"/>
+                <a:cs typeface="Garet"/>
+                <a:sym typeface="Garet"/>
+              </a:rPr>
+              <a:t>(/sys/kernel/</a:t>
+            </a:r>
+            <a:r>
+              <a:rPr lang="en-US" sz="2800" spc="-78" dirty="0" err="1">
+                <a:solidFill>
+                  <a:srgbClr val="EBF5FE"/>
+                </a:solidFill>
+                <a:latin typeface="Garet"/>
+                <a:ea typeface="Garet"/>
+                <a:cs typeface="Garet"/>
+                <a:sym typeface="Garet"/>
+              </a:rPr>
+              <a:t>file_monitor</a:t>
+            </a:r>
+            <a:r>
+              <a:rPr lang="en-US" sz="2800" spc="-78" dirty="0">
+                <a:solidFill>
+                  <a:srgbClr val="EBF5FE"/>
+                </a:solidFill>
+                <a:latin typeface="Garet"/>
+                <a:ea typeface="Garet"/>
+                <a:cs typeface="Garet"/>
+                <a:sym typeface="Garet"/>
+              </a:rPr>
+              <a:t>/</a:t>
+            </a:r>
+            <a:r>
+              <a:rPr lang="en-US" sz="2800" spc="-78" dirty="0" err="1">
+                <a:solidFill>
+                  <a:srgbClr val="EBF5FE"/>
+                </a:solidFill>
+                <a:latin typeface="Garet"/>
+                <a:ea typeface="Garet"/>
+                <a:cs typeface="Garet"/>
+                <a:sym typeface="Garet"/>
+              </a:rPr>
+              <a:t>target_path</a:t>
+            </a:r>
+            <a:r>
+              <a:rPr lang="en-US" sz="2800" spc="-78" dirty="0">
+                <a:solidFill>
+                  <a:srgbClr val="EBF5FE"/>
+                </a:solidFill>
+                <a:latin typeface="Garet"/>
+                <a:ea typeface="Garet"/>
+                <a:cs typeface="Garet"/>
+                <a:sym typeface="Garet"/>
+              </a:rPr>
+              <a:t>): </a:t>
+            </a:r>
+            <a:r>
+              <a:rPr lang="en-US" sz="2800" spc="-78" dirty="0" err="1">
+                <a:solidFill>
+                  <a:srgbClr val="EBF5FE"/>
+                </a:solidFill>
+                <a:latin typeface="Garet"/>
+                <a:ea typeface="Garet"/>
+                <a:cs typeface="Garet"/>
+                <a:sym typeface="Garet"/>
+              </a:rPr>
+              <a:t>Umesto</a:t>
+            </a:r>
+            <a:r>
+              <a:rPr lang="en-US" sz="2800" spc="-78" dirty="0">
+                <a:solidFill>
+                  <a:srgbClr val="EBF5FE"/>
+                </a:solidFill>
+                <a:latin typeface="Garet"/>
+                <a:ea typeface="Garet"/>
+                <a:cs typeface="Garet"/>
+                <a:sym typeface="Garet"/>
+              </a:rPr>
+              <a:t> </a:t>
+            </a:r>
+            <a:r>
+              <a:rPr lang="en-US" sz="2800" spc="-78" dirty="0" err="1">
+                <a:solidFill>
+                  <a:srgbClr val="EBF5FE"/>
+                </a:solidFill>
+                <a:latin typeface="Garet"/>
+                <a:ea typeface="Garet"/>
+                <a:cs typeface="Garet"/>
+                <a:sym typeface="Garet"/>
+              </a:rPr>
+              <a:t>statičkog</a:t>
+            </a:r>
+            <a:r>
+              <a:rPr lang="en-US" sz="2800" spc="-78" dirty="0">
+                <a:solidFill>
+                  <a:srgbClr val="EBF5FE"/>
+                </a:solidFill>
+                <a:latin typeface="Garet"/>
+                <a:ea typeface="Garet"/>
+                <a:cs typeface="Garet"/>
+                <a:sym typeface="Garet"/>
+              </a:rPr>
+              <a:t> </a:t>
+            </a:r>
+            <a:r>
+              <a:rPr lang="en-US" sz="2800" spc="-78" dirty="0" err="1">
+                <a:solidFill>
+                  <a:srgbClr val="EBF5FE"/>
+                </a:solidFill>
+                <a:latin typeface="Garet"/>
+                <a:ea typeface="Garet"/>
+                <a:cs typeface="Garet"/>
+                <a:sym typeface="Garet"/>
+              </a:rPr>
+              <a:t>prosleđivanja</a:t>
+            </a:r>
+            <a:r>
+              <a:rPr lang="en-US" sz="2800" spc="-78" dirty="0">
+                <a:solidFill>
+                  <a:srgbClr val="EBF5FE"/>
+                </a:solidFill>
+                <a:latin typeface="Garet"/>
+                <a:ea typeface="Garet"/>
+                <a:cs typeface="Garet"/>
+                <a:sym typeface="Garet"/>
+              </a:rPr>
+              <a:t> </a:t>
+            </a:r>
+            <a:r>
+              <a:rPr lang="en-US" sz="2800" spc="-78" dirty="0" err="1">
+                <a:solidFill>
+                  <a:srgbClr val="EBF5FE"/>
+                </a:solidFill>
+                <a:latin typeface="Garet"/>
+                <a:ea typeface="Garet"/>
+                <a:cs typeface="Garet"/>
+                <a:sym typeface="Garet"/>
+              </a:rPr>
+              <a:t>parametara</a:t>
+            </a:r>
+            <a:r>
+              <a:rPr lang="en-US" sz="2800" spc="-78" dirty="0">
+                <a:solidFill>
+                  <a:srgbClr val="EBF5FE"/>
+                </a:solidFill>
+                <a:latin typeface="Garet"/>
+                <a:ea typeface="Garet"/>
+                <a:cs typeface="Garet"/>
+                <a:sym typeface="Garet"/>
+              </a:rPr>
+              <a:t> </a:t>
+            </a:r>
+            <a:r>
+              <a:rPr lang="en-US" sz="2800" spc="-78" dirty="0" err="1">
+                <a:solidFill>
+                  <a:srgbClr val="EBF5FE"/>
+                </a:solidFill>
+                <a:latin typeface="Garet"/>
+                <a:ea typeface="Garet"/>
+                <a:cs typeface="Garet"/>
+                <a:sym typeface="Garet"/>
+              </a:rPr>
+              <a:t>pri</a:t>
+            </a:r>
+            <a:r>
+              <a:rPr lang="en-US" sz="2800" spc="-78" dirty="0">
+                <a:solidFill>
+                  <a:srgbClr val="EBF5FE"/>
+                </a:solidFill>
+                <a:latin typeface="Garet"/>
+                <a:ea typeface="Garet"/>
+                <a:cs typeface="Garet"/>
+                <a:sym typeface="Garet"/>
+              </a:rPr>
+              <a:t> </a:t>
+            </a:r>
+            <a:r>
+              <a:rPr lang="en-US" sz="2800" spc="-78" dirty="0" err="1">
+                <a:solidFill>
+                  <a:srgbClr val="EBF5FE"/>
+                </a:solidFill>
+                <a:latin typeface="Garet"/>
+                <a:ea typeface="Garet"/>
+                <a:cs typeface="Garet"/>
+                <a:sym typeface="Garet"/>
+              </a:rPr>
+              <a:t>učitavanju</a:t>
+            </a:r>
+            <a:r>
+              <a:rPr lang="en-US" sz="2800" spc="-78" dirty="0">
+                <a:solidFill>
+                  <a:srgbClr val="EBF5FE"/>
+                </a:solidFill>
+                <a:latin typeface="Garet"/>
+                <a:ea typeface="Garet"/>
+                <a:cs typeface="Garet"/>
+                <a:sym typeface="Garet"/>
+              </a:rPr>
+              <a:t>, </a:t>
+            </a:r>
+            <a:r>
+              <a:rPr lang="en-US" sz="2800" spc="-78" dirty="0" err="1">
+                <a:solidFill>
+                  <a:srgbClr val="EBF5FE"/>
+                </a:solidFill>
+                <a:latin typeface="Garet"/>
+                <a:ea typeface="Garet"/>
+                <a:cs typeface="Garet"/>
+                <a:sym typeface="Garet"/>
+              </a:rPr>
+              <a:t>modul</a:t>
+            </a:r>
+            <a:r>
+              <a:rPr lang="en-US" sz="2800" spc="-78" dirty="0">
+                <a:solidFill>
+                  <a:srgbClr val="EBF5FE"/>
+                </a:solidFill>
+                <a:latin typeface="Garet"/>
+                <a:ea typeface="Garet"/>
+                <a:cs typeface="Garet"/>
+                <a:sym typeface="Garet"/>
+              </a:rPr>
+              <a:t> </a:t>
+            </a:r>
+            <a:r>
+              <a:rPr lang="en-US" sz="2800" spc="-78" dirty="0" err="1">
+                <a:solidFill>
+                  <a:srgbClr val="EBF5FE"/>
+                </a:solidFill>
+                <a:latin typeface="Garet"/>
+                <a:ea typeface="Garet"/>
+                <a:cs typeface="Garet"/>
+                <a:sym typeface="Garet"/>
+              </a:rPr>
+              <a:t>kreira</a:t>
+            </a:r>
+            <a:r>
+              <a:rPr lang="en-US" sz="2800" spc="-78" dirty="0">
+                <a:solidFill>
+                  <a:srgbClr val="EBF5FE"/>
+                </a:solidFill>
+                <a:latin typeface="Garet"/>
+                <a:ea typeface="Garet"/>
+                <a:cs typeface="Garet"/>
+                <a:sym typeface="Garet"/>
+              </a:rPr>
+              <a:t> </a:t>
+            </a:r>
+            <a:r>
+              <a:rPr lang="en-US" sz="2800" spc="-78" dirty="0" err="1">
+                <a:solidFill>
+                  <a:srgbClr val="EBF5FE"/>
+                </a:solidFill>
+                <a:latin typeface="Garet"/>
+                <a:ea typeface="Garet"/>
+                <a:cs typeface="Garet"/>
+                <a:sym typeface="Garet"/>
+              </a:rPr>
+              <a:t>dinamički</a:t>
+            </a:r>
+            <a:r>
+              <a:rPr lang="en-US" sz="2800" spc="-78" dirty="0">
+                <a:solidFill>
+                  <a:srgbClr val="EBF5FE"/>
+                </a:solidFill>
+                <a:latin typeface="Garet"/>
+                <a:ea typeface="Garet"/>
+                <a:cs typeface="Garet"/>
+                <a:sym typeface="Garet"/>
+              </a:rPr>
+              <a:t> </a:t>
+            </a:r>
+            <a:r>
+              <a:rPr lang="en-US" sz="2800" spc="-78" dirty="0" err="1">
+                <a:solidFill>
+                  <a:srgbClr val="EBF5FE"/>
+                </a:solidFill>
+                <a:latin typeface="Garet"/>
+                <a:ea typeface="Garet"/>
+                <a:cs typeface="Garet"/>
+                <a:sym typeface="Garet"/>
+              </a:rPr>
+              <a:t>SysFS</a:t>
+            </a:r>
+            <a:r>
+              <a:rPr lang="en-US" sz="2800" spc="-78" dirty="0">
+                <a:solidFill>
+                  <a:srgbClr val="EBF5FE"/>
+                </a:solidFill>
+                <a:latin typeface="Garet"/>
+                <a:ea typeface="Garet"/>
+                <a:cs typeface="Garet"/>
+                <a:sym typeface="Garet"/>
+              </a:rPr>
+              <a:t> </a:t>
+            </a:r>
+            <a:r>
+              <a:rPr lang="en-US" sz="2800" spc="-78" dirty="0" err="1">
+                <a:solidFill>
+                  <a:srgbClr val="EBF5FE"/>
+                </a:solidFill>
+                <a:latin typeface="Garet"/>
+                <a:ea typeface="Garet"/>
+                <a:cs typeface="Garet"/>
+                <a:sym typeface="Garet"/>
+              </a:rPr>
+              <a:t>interfejs</a:t>
+            </a:r>
+            <a:r>
+              <a:rPr lang="en-US" sz="2800" spc="-78" dirty="0">
+                <a:solidFill>
+                  <a:srgbClr val="EBF5FE"/>
+                </a:solidFill>
+                <a:latin typeface="Garet"/>
+                <a:ea typeface="Garet"/>
+                <a:cs typeface="Garet"/>
+                <a:sym typeface="Garet"/>
+              </a:rPr>
+              <a:t>. Ovo </a:t>
             </a:r>
             <a:r>
               <a:rPr lang="en-US" sz="2800" spc="-78" dirty="0" err="1">
@@ -21776,205 +22372,570 @@
                 <a:cs typeface="Garet"/>
                 <a:sym typeface="Garet"/>
               </a:rPr>
-              <a:t>modifikaciju</a:t>
-            </a:r>
-            <a:r>
-              <a:rPr lang="en-US" sz="2800" spc="-78" dirty="0">
-                <a:solidFill>
-                  <a:srgbClr val="EBF5FE"/>
-                </a:solidFill>
-                <a:latin typeface="Garet"/>
-                <a:ea typeface="Garet"/>
-                <a:cs typeface="Garet"/>
-                <a:sym typeface="Garet"/>
-              </a:rPr>
-              <a:t> </a:t>
-            </a:r>
-            <a:r>
-              <a:rPr lang="en-US" sz="2800" spc="-78" dirty="0" err="1">
-                <a:solidFill>
-                  <a:srgbClr val="EBF5FE"/>
-                </a:solidFill>
-                <a:latin typeface="Garet"/>
-                <a:ea typeface="Garet"/>
-                <a:cs typeface="Garet"/>
-                <a:sym typeface="Garet"/>
-              </a:rPr>
-              <a:t>ponašanja</a:t>
-            </a:r>
-            <a:r>
-              <a:rPr lang="en-US" sz="2800" spc="-78" dirty="0">
-                <a:solidFill>
-                  <a:srgbClr val="EBF5FE"/>
-                </a:solidFill>
-                <a:latin typeface="Garet"/>
-                <a:ea typeface="Garet"/>
-                <a:cs typeface="Garet"/>
-                <a:sym typeface="Garet"/>
-              </a:rPr>
-              <a:t> kernela bez </a:t>
-            </a:r>
-            <a:r>
-              <a:rPr lang="en-US" sz="2800" spc="-78" dirty="0" err="1">
-                <a:solidFill>
-                  <a:srgbClr val="EBF5FE"/>
-                </a:solidFill>
-                <a:latin typeface="Garet"/>
-                <a:ea typeface="Garet"/>
-                <a:cs typeface="Garet"/>
-                <a:sym typeface="Garet"/>
-              </a:rPr>
-              <a:t>potrebe</a:t>
-            </a:r>
-            <a:r>
-              <a:rPr lang="en-US" sz="2800" spc="-78" dirty="0">
-                <a:solidFill>
-                  <a:srgbClr val="EBF5FE"/>
-                </a:solidFill>
-                <a:latin typeface="Garet"/>
-                <a:ea typeface="Garet"/>
-                <a:cs typeface="Garet"/>
-                <a:sym typeface="Garet"/>
-              </a:rPr>
-              <a:t> za </a:t>
-            </a:r>
-            <a:r>
-              <a:rPr lang="en-US" sz="2800" spc="-78" dirty="0" err="1">
-                <a:solidFill>
-                  <a:srgbClr val="EBF5FE"/>
-                </a:solidFill>
-                <a:latin typeface="Garet"/>
-                <a:ea typeface="Garet"/>
-                <a:cs typeface="Garet"/>
-                <a:sym typeface="Garet"/>
-              </a:rPr>
-              <a:t>ponovnim</a:t>
-            </a:r>
-            <a:r>
-              <a:rPr lang="en-US" sz="2800" spc="-78" dirty="0">
-                <a:solidFill>
-                  <a:srgbClr val="EBF5FE"/>
-                </a:solidFill>
-                <a:latin typeface="Garet"/>
-                <a:ea typeface="Garet"/>
-                <a:cs typeface="Garet"/>
-                <a:sym typeface="Garet"/>
-              </a:rPr>
-              <a:t> </a:t>
-            </a:r>
-            <a:r>
-              <a:rPr lang="en-US" sz="2800" spc="-78" dirty="0" err="1">
-                <a:solidFill>
-                  <a:srgbClr val="EBF5FE"/>
-                </a:solidFill>
-                <a:latin typeface="Garet"/>
-                <a:ea typeface="Garet"/>
-                <a:cs typeface="Garet"/>
-                <a:sym typeface="Garet"/>
-              </a:rPr>
-              <a:t>kompajliranjem</a:t>
-            </a:r>
-            <a:r>
-              <a:rPr lang="en-US" sz="2800" spc="-78" dirty="0">
-                <a:solidFill>
-                  <a:srgbClr val="EBF5FE"/>
-                </a:solidFill>
-                <a:latin typeface="Garet"/>
-                <a:ea typeface="Garet"/>
-                <a:cs typeface="Garet"/>
-                <a:sym typeface="Garet"/>
-              </a:rPr>
-              <a:t> </a:t>
-            </a:r>
-            <a:r>
-              <a:rPr lang="en-US" sz="2800" spc="-78" dirty="0" err="1">
-                <a:solidFill>
-                  <a:srgbClr val="EBF5FE"/>
-                </a:solidFill>
-                <a:latin typeface="Garet"/>
-                <a:ea typeface="Garet"/>
-                <a:cs typeface="Garet"/>
-                <a:sym typeface="Garet"/>
-              </a:rPr>
-              <a:t>celog</a:t>
-            </a:r>
-            <a:r>
-              <a:rPr lang="en-US" sz="2800" spc="-78" dirty="0">
-                <a:solidFill>
-                  <a:srgbClr val="EBF5FE"/>
-                </a:solidFill>
-                <a:latin typeface="Garet"/>
-                <a:ea typeface="Garet"/>
-                <a:cs typeface="Garet"/>
-                <a:sym typeface="Garet"/>
-              </a:rPr>
-              <a:t> </a:t>
-            </a:r>
-            <a:r>
-              <a:rPr lang="en-US" sz="2800" spc="-78" dirty="0" err="1">
-                <a:solidFill>
-                  <a:srgbClr val="EBF5FE"/>
-                </a:solidFill>
-                <a:latin typeface="Garet"/>
-                <a:ea typeface="Garet"/>
-                <a:cs typeface="Garet"/>
-                <a:sym typeface="Garet"/>
-              </a:rPr>
-              <a:t>sistema</a:t>
-            </a:r>
-            <a:r>
-              <a:rPr lang="en-US" sz="2800" spc="-78" dirty="0">
-                <a:solidFill>
-                  <a:srgbClr val="EBF5FE"/>
-                </a:solidFill>
-                <a:latin typeface="Garet"/>
-                <a:ea typeface="Garet"/>
-                <a:cs typeface="Garet"/>
-                <a:sym typeface="Garet"/>
-              </a:rPr>
-              <a:t> i </a:t>
-            </a:r>
-            <a:r>
-              <a:rPr lang="en-US" sz="2800" spc="-78" dirty="0" err="1">
-                <a:solidFill>
-                  <a:srgbClr val="EBF5FE"/>
-                </a:solidFill>
-                <a:latin typeface="Garet"/>
-                <a:ea typeface="Garet"/>
-                <a:cs typeface="Garet"/>
-                <a:sym typeface="Garet"/>
-              </a:rPr>
-              <a:t>restartovanjem</a:t>
-            </a:r>
-            <a:r>
-              <a:rPr lang="en-US" sz="2800" spc="-78" dirty="0">
-                <a:solidFill>
-                  <a:srgbClr val="EBF5FE"/>
-                </a:solidFill>
-                <a:latin typeface="Garet"/>
-                <a:ea typeface="Garet"/>
-                <a:cs typeface="Garet"/>
-                <a:sym typeface="Garet"/>
-              </a:rPr>
-              <a:t> (reboot).</a:t>
-            </a:r>
-            <a:endParaRPr lang="sr-Latn-RS" sz="2800" spc="-78" dirty="0">
-              <a:solidFill>
-                <a:srgbClr val="EBF5FE"/>
-              </a:solidFill>
-              <a:latin typeface="Garet"/>
-              <a:ea typeface="Garet"/>
-              <a:cs typeface="Garet"/>
-              <a:sym typeface="Garet"/>
-            </a:endParaRPr>
+              <a:t>korisniku</a:t>
+            </a:r>
+            <a:r>
+              <a:rPr lang="en-US" sz="2800" spc="-78" dirty="0">
+                <a:solidFill>
+                  <a:srgbClr val="EBF5FE"/>
+                </a:solidFill>
+                <a:latin typeface="Garet"/>
+                <a:ea typeface="Garet"/>
+                <a:cs typeface="Garet"/>
+                <a:sym typeface="Garet"/>
+              </a:rPr>
+              <a:t> da u </a:t>
+            </a:r>
+            <a:r>
+              <a:rPr lang="en-US" sz="2800" spc="-78" dirty="0" err="1">
+                <a:solidFill>
+                  <a:srgbClr val="EBF5FE"/>
+                </a:solidFill>
+                <a:latin typeface="Garet"/>
+                <a:ea typeface="Garet"/>
+                <a:cs typeface="Garet"/>
+                <a:sym typeface="Garet"/>
+              </a:rPr>
+              <a:t>bilo</a:t>
+            </a:r>
+            <a:r>
+              <a:rPr lang="en-US" sz="2800" spc="-78" dirty="0">
+                <a:solidFill>
+                  <a:srgbClr val="EBF5FE"/>
+                </a:solidFill>
+                <a:latin typeface="Garet"/>
+                <a:ea typeface="Garet"/>
+                <a:cs typeface="Garet"/>
+                <a:sym typeface="Garet"/>
+              </a:rPr>
+              <a:t> </a:t>
+            </a:r>
+            <a:r>
+              <a:rPr lang="en-US" sz="2800" spc="-78" dirty="0" err="1">
+                <a:solidFill>
+                  <a:srgbClr val="EBF5FE"/>
+                </a:solidFill>
+                <a:latin typeface="Garet"/>
+                <a:ea typeface="Garet"/>
+                <a:cs typeface="Garet"/>
+                <a:sym typeface="Garet"/>
+              </a:rPr>
+              <a:t>kom</a:t>
+            </a:r>
+            <a:r>
+              <a:rPr lang="en-US" sz="2800" spc="-78" dirty="0">
+                <a:solidFill>
+                  <a:srgbClr val="EBF5FE"/>
+                </a:solidFill>
+                <a:latin typeface="Garet"/>
+                <a:ea typeface="Garet"/>
+                <a:cs typeface="Garet"/>
+                <a:sym typeface="Garet"/>
+              </a:rPr>
+              <a:t> </a:t>
+            </a:r>
+            <a:r>
+              <a:rPr lang="en-US" sz="2800" spc="-78" dirty="0" err="1">
+                <a:solidFill>
+                  <a:srgbClr val="EBF5FE"/>
+                </a:solidFill>
+                <a:latin typeface="Garet"/>
+                <a:ea typeface="Garet"/>
+                <a:cs typeface="Garet"/>
+                <a:sym typeface="Garet"/>
+              </a:rPr>
+              <a:t>momentu</a:t>
+            </a:r>
+            <a:r>
+              <a:rPr lang="en-US" sz="2800" spc="-78" dirty="0">
+                <a:solidFill>
+                  <a:srgbClr val="EBF5FE"/>
+                </a:solidFill>
+                <a:latin typeface="Garet"/>
+                <a:ea typeface="Garet"/>
+                <a:cs typeface="Garet"/>
+                <a:sym typeface="Garet"/>
+              </a:rPr>
+              <a:t> </a:t>
+            </a:r>
+            <a:r>
+              <a:rPr lang="en-US" sz="2800" spc="-78" dirty="0" err="1">
+                <a:solidFill>
+                  <a:srgbClr val="EBF5FE"/>
+                </a:solidFill>
+                <a:latin typeface="Garet"/>
+                <a:ea typeface="Garet"/>
+                <a:cs typeface="Garet"/>
+                <a:sym typeface="Garet"/>
+              </a:rPr>
+              <a:t>promeni</a:t>
+            </a:r>
+            <a:r>
+              <a:rPr lang="en-US" sz="2800" spc="-78" dirty="0">
+                <a:solidFill>
+                  <a:srgbClr val="EBF5FE"/>
+                </a:solidFill>
+                <a:latin typeface="Garet"/>
+                <a:ea typeface="Garet"/>
+                <a:cs typeface="Garet"/>
+                <a:sym typeface="Garet"/>
+              </a:rPr>
+              <a:t> </a:t>
+            </a:r>
+            <a:r>
+              <a:rPr lang="en-US" sz="2800" spc="-78" dirty="0" err="1">
+                <a:solidFill>
+                  <a:srgbClr val="EBF5FE"/>
+                </a:solidFill>
+                <a:latin typeface="Garet"/>
+                <a:ea typeface="Garet"/>
+                <a:cs typeface="Garet"/>
+                <a:sym typeface="Garet"/>
+              </a:rPr>
+              <a:t>putanju</a:t>
+            </a:r>
+            <a:r>
+              <a:rPr lang="en-US" sz="2800" spc="-78" dirty="0">
+                <a:solidFill>
+                  <a:srgbClr val="EBF5FE"/>
+                </a:solidFill>
+                <a:latin typeface="Garet"/>
+                <a:ea typeface="Garet"/>
+                <a:cs typeface="Garet"/>
+                <a:sym typeface="Garet"/>
+              </a:rPr>
+              <a:t> </a:t>
+            </a:r>
+            <a:r>
+              <a:rPr lang="en-US" sz="2800" spc="-78" dirty="0" err="1">
+                <a:solidFill>
+                  <a:srgbClr val="EBF5FE"/>
+                </a:solidFill>
+                <a:latin typeface="Garet"/>
+                <a:ea typeface="Garet"/>
+                <a:cs typeface="Garet"/>
+                <a:sym typeface="Garet"/>
+              </a:rPr>
+              <a:t>fajla</a:t>
+            </a:r>
+            <a:r>
+              <a:rPr lang="en-US" sz="2800" spc="-78" dirty="0">
+                <a:solidFill>
+                  <a:srgbClr val="EBF5FE"/>
+                </a:solidFill>
+                <a:latin typeface="Garet"/>
+                <a:ea typeface="Garet"/>
+                <a:cs typeface="Garet"/>
+                <a:sym typeface="Garet"/>
+              </a:rPr>
+              <a:t> koji se </a:t>
+            </a:r>
+            <a:r>
+              <a:rPr lang="en-US" sz="2800" spc="-78" dirty="0" err="1">
+                <a:solidFill>
+                  <a:srgbClr val="EBF5FE"/>
+                </a:solidFill>
+                <a:latin typeface="Garet"/>
+                <a:ea typeface="Garet"/>
+                <a:cs typeface="Garet"/>
+                <a:sym typeface="Garet"/>
+              </a:rPr>
+              <a:t>prati</a:t>
+            </a:r>
+            <a:r>
+              <a:rPr lang="en-US" sz="2800" spc="-78" dirty="0">
+                <a:solidFill>
+                  <a:srgbClr val="EBF5FE"/>
+                </a:solidFill>
+                <a:latin typeface="Garet"/>
+                <a:ea typeface="Garet"/>
+                <a:cs typeface="Garet"/>
+                <a:sym typeface="Garet"/>
+              </a:rPr>
+              <a:t> </a:t>
+            </a:r>
+            <a:r>
+              <a:rPr lang="en-US" sz="2800" spc="-78" dirty="0" err="1">
+                <a:solidFill>
+                  <a:srgbClr val="EBF5FE"/>
+                </a:solidFill>
+                <a:latin typeface="Garet"/>
+                <a:ea typeface="Garet"/>
+                <a:cs typeface="Garet"/>
+                <a:sym typeface="Garet"/>
+              </a:rPr>
+              <a:t>jednostavnim</a:t>
+            </a:r>
+            <a:r>
+              <a:rPr lang="en-US" sz="2800" spc="-78" dirty="0">
+                <a:solidFill>
+                  <a:srgbClr val="EBF5FE"/>
+                </a:solidFill>
+                <a:latin typeface="Garet"/>
+                <a:ea typeface="Garet"/>
+                <a:cs typeface="Garet"/>
+                <a:sym typeface="Garet"/>
+              </a:rPr>
+              <a:t> </a:t>
+            </a:r>
+            <a:r>
+              <a:rPr lang="en-US" sz="2800" spc="-78" dirty="0" err="1">
+                <a:solidFill>
+                  <a:srgbClr val="EBF5FE"/>
+                </a:solidFill>
+                <a:latin typeface="Garet"/>
+                <a:ea typeface="Garet"/>
+                <a:cs typeface="Garet"/>
+                <a:sym typeface="Garet"/>
+              </a:rPr>
+              <a:t>upisom</a:t>
+            </a:r>
+            <a:r>
+              <a:rPr lang="en-US" sz="2800" spc="-78" dirty="0">
+                <a:solidFill>
+                  <a:srgbClr val="EBF5FE"/>
+                </a:solidFill>
+                <a:latin typeface="Garet"/>
+                <a:ea typeface="Garet"/>
+                <a:cs typeface="Garet"/>
+                <a:sym typeface="Garet"/>
+              </a:rPr>
+              <a:t> u </a:t>
+            </a:r>
+            <a:r>
+              <a:rPr lang="en-US" sz="2800" spc="-78" dirty="0" err="1">
+                <a:solidFill>
+                  <a:srgbClr val="EBF5FE"/>
+                </a:solidFill>
+                <a:latin typeface="Garet"/>
+                <a:ea typeface="Garet"/>
+                <a:cs typeface="Garet"/>
+                <a:sym typeface="Garet"/>
+              </a:rPr>
+              <a:t>SysFS</a:t>
+            </a:r>
+            <a:r>
+              <a:rPr lang="en-US" sz="2800" spc="-78" dirty="0">
+                <a:solidFill>
+                  <a:srgbClr val="EBF5FE"/>
+                </a:solidFill>
+                <a:latin typeface="Garet"/>
+                <a:ea typeface="Garet"/>
+                <a:cs typeface="Garet"/>
+                <a:sym typeface="Garet"/>
+              </a:rPr>
+              <a:t> </a:t>
+            </a:r>
+            <a:r>
+              <a:rPr lang="en-US" sz="2800" spc="-78" dirty="0" err="1">
+                <a:solidFill>
+                  <a:srgbClr val="EBF5FE"/>
+                </a:solidFill>
+                <a:latin typeface="Garet"/>
+                <a:ea typeface="Garet"/>
+                <a:cs typeface="Garet"/>
+                <a:sym typeface="Garet"/>
+              </a:rPr>
+              <a:t>fajl</a:t>
+            </a:r>
+            <a:r>
+              <a:rPr lang="en-US" sz="2800" spc="-78" dirty="0">
+                <a:solidFill>
+                  <a:srgbClr val="EBF5FE"/>
+                </a:solidFill>
+                <a:latin typeface="Garet"/>
+                <a:ea typeface="Garet"/>
+                <a:cs typeface="Garet"/>
+                <a:sym typeface="Garet"/>
+              </a:rPr>
+              <a:t>, bez </a:t>
+            </a:r>
+            <a:r>
+              <a:rPr lang="en-US" sz="2800" spc="-78" dirty="0" err="1">
+                <a:solidFill>
+                  <a:srgbClr val="EBF5FE"/>
+                </a:solidFill>
+                <a:latin typeface="Garet"/>
+                <a:ea typeface="Garet"/>
+                <a:cs typeface="Garet"/>
+                <a:sym typeface="Garet"/>
+              </a:rPr>
+              <a:t>ponovnog</a:t>
+            </a:r>
+            <a:r>
+              <a:rPr lang="en-US" sz="2800" spc="-78" dirty="0">
+                <a:solidFill>
+                  <a:srgbClr val="EBF5FE"/>
+                </a:solidFill>
+                <a:latin typeface="Garet"/>
+                <a:ea typeface="Garet"/>
+                <a:cs typeface="Garet"/>
+                <a:sym typeface="Garet"/>
+              </a:rPr>
+              <a:t> </a:t>
+            </a:r>
+            <a:r>
+              <a:rPr lang="en-US" sz="2800" spc="-78" dirty="0" err="1">
+                <a:solidFill>
+                  <a:srgbClr val="EBF5FE"/>
+                </a:solidFill>
+                <a:latin typeface="Garet"/>
+                <a:ea typeface="Garet"/>
+                <a:cs typeface="Garet"/>
+                <a:sym typeface="Garet"/>
+              </a:rPr>
+              <a:t>učitavanja</a:t>
+            </a:r>
+            <a:r>
+              <a:rPr lang="en-US" sz="2800" spc="-78" dirty="0">
+                <a:solidFill>
+                  <a:srgbClr val="EBF5FE"/>
+                </a:solidFill>
+                <a:latin typeface="Garet"/>
+                <a:ea typeface="Garet"/>
+                <a:cs typeface="Garet"/>
+                <a:sym typeface="Garet"/>
+              </a:rPr>
+              <a:t> (</a:t>
+            </a:r>
+            <a:r>
+              <a:rPr lang="en-US" sz="2800" spc="-78" dirty="0" err="1">
+                <a:solidFill>
+                  <a:srgbClr val="EBF5FE"/>
+                </a:solidFill>
+                <a:latin typeface="Garet"/>
+                <a:ea typeface="Garet"/>
+                <a:cs typeface="Garet"/>
+                <a:sym typeface="Garet"/>
+              </a:rPr>
+              <a:t>rmmod</a:t>
+            </a:r>
+            <a:r>
+              <a:rPr lang="en-US" sz="2800" spc="-78" dirty="0">
+                <a:solidFill>
+                  <a:srgbClr val="EBF5FE"/>
+                </a:solidFill>
+                <a:latin typeface="Garet"/>
+                <a:ea typeface="Garet"/>
+                <a:cs typeface="Garet"/>
+                <a:sym typeface="Garet"/>
+              </a:rPr>
+              <a:t>/</a:t>
+            </a:r>
+            <a:r>
+              <a:rPr lang="en-US" sz="2800" spc="-78" dirty="0" err="1">
+                <a:solidFill>
+                  <a:srgbClr val="EBF5FE"/>
+                </a:solidFill>
+                <a:latin typeface="Garet"/>
+                <a:ea typeface="Garet"/>
+                <a:cs typeface="Garet"/>
+                <a:sym typeface="Garet"/>
+              </a:rPr>
+              <a:t>insmod</a:t>
+            </a:r>
+            <a:r>
+              <a:rPr lang="en-US" sz="2800" spc="-78" dirty="0">
+                <a:solidFill>
+                  <a:srgbClr val="EBF5FE"/>
+                </a:solidFill>
+                <a:latin typeface="Garet"/>
+                <a:ea typeface="Garet"/>
+                <a:cs typeface="Garet"/>
+                <a:sym typeface="Garet"/>
+              </a:rPr>
+              <a:t>) </a:t>
+            </a:r>
+            <a:r>
+              <a:rPr lang="en-US" sz="2800" spc="-78" dirty="0" err="1">
+                <a:solidFill>
+                  <a:srgbClr val="EBF5FE"/>
+                </a:solidFill>
+                <a:latin typeface="Garet"/>
+                <a:ea typeface="Garet"/>
+                <a:cs typeface="Garet"/>
+                <a:sym typeface="Garet"/>
+              </a:rPr>
+              <a:t>samog</a:t>
+            </a:r>
+            <a:r>
+              <a:rPr lang="en-US" sz="2800" spc="-78" dirty="0">
+                <a:solidFill>
+                  <a:srgbClr val="EBF5FE"/>
+                </a:solidFill>
+                <a:latin typeface="Garet"/>
+                <a:ea typeface="Garet"/>
+                <a:cs typeface="Garet"/>
+                <a:sym typeface="Garet"/>
+              </a:rPr>
+              <a:t> </a:t>
+            </a:r>
+            <a:r>
+              <a:rPr lang="en-US" sz="2800" spc="-78" dirty="0" err="1">
+                <a:solidFill>
+                  <a:srgbClr val="EBF5FE"/>
+                </a:solidFill>
+                <a:latin typeface="Garet"/>
+                <a:ea typeface="Garet"/>
+                <a:cs typeface="Garet"/>
+                <a:sym typeface="Garet"/>
+              </a:rPr>
+              <a:t>modula</a:t>
+            </a:r>
+            <a:r>
+              <a:rPr lang="en-US" sz="2800" spc="-78" dirty="0">
+                <a:solidFill>
+                  <a:srgbClr val="EBF5FE"/>
+                </a:solidFill>
+                <a:latin typeface="Garet"/>
+                <a:ea typeface="Garet"/>
+                <a:cs typeface="Garet"/>
+                <a:sym typeface="Garet"/>
+              </a:rPr>
+              <a:t>:  echo "/</a:t>
+            </a:r>
+            <a:r>
+              <a:rPr lang="en-US" sz="2800" spc="-78" dirty="0" err="1">
+                <a:solidFill>
+                  <a:srgbClr val="EBF5FE"/>
+                </a:solidFill>
+                <a:latin typeface="Garet"/>
+                <a:ea typeface="Garet"/>
+                <a:cs typeface="Garet"/>
+                <a:sym typeface="Garet"/>
+              </a:rPr>
+              <a:t>putanja</a:t>
+            </a:r>
+            <a:r>
+              <a:rPr lang="en-US" sz="2800" spc="-78" dirty="0">
+                <a:solidFill>
+                  <a:srgbClr val="EBF5FE"/>
+                </a:solidFill>
+                <a:latin typeface="Garet"/>
+                <a:ea typeface="Garet"/>
+                <a:cs typeface="Garet"/>
+                <a:sym typeface="Garet"/>
+              </a:rPr>
+              <a:t>/do/</a:t>
+            </a:r>
+            <a:r>
+              <a:rPr lang="en-US" sz="2800" spc="-78" dirty="0" err="1">
+                <a:solidFill>
+                  <a:srgbClr val="EBF5FE"/>
+                </a:solidFill>
+                <a:latin typeface="Garet"/>
+                <a:ea typeface="Garet"/>
+                <a:cs typeface="Garet"/>
+                <a:sym typeface="Garet"/>
+              </a:rPr>
+              <a:t>fajla</a:t>
+            </a:r>
+            <a:r>
+              <a:rPr lang="en-US" sz="2800" spc="-78" dirty="0">
+                <a:solidFill>
+                  <a:srgbClr val="EBF5FE"/>
+                </a:solidFill>
+                <a:latin typeface="Garet"/>
+                <a:ea typeface="Garet"/>
+                <a:cs typeface="Garet"/>
+                <a:sym typeface="Garet"/>
+              </a:rPr>
+              <a:t>" | </a:t>
+            </a:r>
+            <a:r>
+              <a:rPr lang="en-US" sz="2800" spc="-78" dirty="0" err="1">
+                <a:solidFill>
+                  <a:srgbClr val="EBF5FE"/>
+                </a:solidFill>
+                <a:latin typeface="Garet"/>
+                <a:ea typeface="Garet"/>
+                <a:cs typeface="Garet"/>
+                <a:sym typeface="Garet"/>
+              </a:rPr>
+              <a:t>sudo</a:t>
+            </a:r>
+            <a:r>
+              <a:rPr lang="en-US" sz="2800" spc="-78" dirty="0">
+                <a:solidFill>
+                  <a:srgbClr val="EBF5FE"/>
+                </a:solidFill>
+                <a:latin typeface="Garet"/>
+                <a:ea typeface="Garet"/>
+                <a:cs typeface="Garet"/>
+                <a:sym typeface="Garet"/>
+              </a:rPr>
+              <a:t> tee /sys/kernel/</a:t>
+            </a:r>
+            <a:r>
+              <a:rPr lang="en-US" sz="2800" spc="-78" dirty="0" err="1">
+                <a:solidFill>
+                  <a:srgbClr val="EBF5FE"/>
+                </a:solidFill>
+                <a:latin typeface="Garet"/>
+                <a:ea typeface="Garet"/>
+                <a:cs typeface="Garet"/>
+                <a:sym typeface="Garet"/>
+              </a:rPr>
+              <a:t>file_monitor</a:t>
+            </a:r>
+            <a:r>
+              <a:rPr lang="en-US" sz="2800" spc="-78" dirty="0">
+                <a:solidFill>
+                  <a:srgbClr val="EBF5FE"/>
+                </a:solidFill>
+                <a:latin typeface="Garet"/>
+                <a:ea typeface="Garet"/>
+                <a:cs typeface="Garet"/>
+                <a:sym typeface="Garet"/>
+              </a:rPr>
+              <a:t>/</a:t>
+            </a:r>
+            <a:r>
+              <a:rPr lang="en-US" sz="2800" spc="-78" dirty="0" err="1">
+                <a:solidFill>
+                  <a:srgbClr val="EBF5FE"/>
+                </a:solidFill>
+                <a:latin typeface="Garet"/>
+                <a:ea typeface="Garet"/>
+                <a:cs typeface="Garet"/>
+                <a:sym typeface="Garet"/>
+              </a:rPr>
+              <a:t>target_path</a:t>
+            </a:r>
+            <a:r>
+              <a:rPr lang="en-US" sz="2800" spc="-78" dirty="0">
+                <a:solidFill>
+                  <a:srgbClr val="EBF5FE"/>
+                </a:solidFill>
+                <a:latin typeface="Garet"/>
+                <a:ea typeface="Garet"/>
+                <a:cs typeface="Garet"/>
+                <a:sym typeface="Garet"/>
+              </a:rPr>
+              <a:t>  </a:t>
+            </a:r>
           </a:p>
           <a:p>
-            <a:pPr>
+            <a:pPr marL="457200" indent="-457200">
               <a:spcBef>
                 <a:spcPct val="0"/>
               </a:spcBef>
+              <a:buFont typeface="Arial" panose="020B0604020202020204" pitchFamily="34" charset="0"/>
+              <a:buChar char="•"/>
             </a:pPr>
             <a:r>
+              <a:rPr lang="en-US" sz="2800" b="1" spc="-78" dirty="0">
+                <a:solidFill>
+                  <a:srgbClr val="EBF5FE"/>
+                </a:solidFill>
+                <a:latin typeface="Garet"/>
+                <a:ea typeface="Garet"/>
+                <a:cs typeface="Garet"/>
+                <a:sym typeface="Garet"/>
+              </a:rPr>
+              <a:t>Lifecycle &amp; </a:t>
+            </a:r>
+            <a:r>
               <a:rPr lang="en-US" sz="2800" b="1" spc="-78" dirty="0" err="1">
                 <a:solidFill>
                   <a:srgbClr val="EBF5FE"/>
@@ -21984,7 +22945,7 @@
                 <a:cs typeface="Garet"/>
                 <a:sym typeface="Garet"/>
               </a:rPr>
-              <a:t>Parametar</a:t>
+              <a:t>Inicijalizacija</a:t>
             </a:r>
             <a:r>
               <a:rPr lang="en-US" sz="2800" b="1" spc="-78" dirty="0">
@@ -21996,10 +22957,178 @@
                 <a:cs typeface="Garet"/>
                 <a:sym typeface="Garet"/>
               </a:rPr>
-              <a:t> </a:t>
-            </a:r>
-            <a:r>
-              <a:rPr lang="en-US" sz="2800" b="1" spc="-78" dirty="0" err="1">
+              <a:t>: </a:t>
+            </a:r>
+            <a:r>
+              <a:rPr lang="en-US" sz="2800" spc="-78" dirty="0" err="1">
+                <a:solidFill>
+                  <a:srgbClr val="EBF5FE"/>
+                </a:solidFill>
+                <a:latin typeface="Garet"/>
+                <a:ea typeface="Garet"/>
+                <a:cs typeface="Garet"/>
+                <a:sym typeface="Garet"/>
+              </a:rPr>
+              <a:t>Standardne</a:t>
+            </a:r>
+            <a:r>
+              <a:rPr lang="en-US" sz="2800" spc="-78" dirty="0">
+                <a:solidFill>
+                  <a:srgbClr val="EBF5FE"/>
+                </a:solidFill>
+                <a:latin typeface="Garet"/>
+                <a:ea typeface="Garet"/>
+                <a:cs typeface="Garet"/>
+                <a:sym typeface="Garet"/>
+              </a:rPr>
+              <a:t> </a:t>
+            </a:r>
+            <a:r>
+              <a:rPr lang="en-US" sz="2800" spc="-78" dirty="0" err="1">
+                <a:solidFill>
+                  <a:srgbClr val="EBF5FE"/>
+                </a:solidFill>
+                <a:latin typeface="Garet"/>
+                <a:ea typeface="Garet"/>
+                <a:cs typeface="Garet"/>
+                <a:sym typeface="Garet"/>
+              </a:rPr>
+              <a:t>module_init</a:t>
+            </a:r>
+            <a:r>
+              <a:rPr lang="en-US" sz="2800" spc="-78" dirty="0">
+                <a:solidFill>
+                  <a:srgbClr val="EBF5FE"/>
+                </a:solidFill>
+                <a:latin typeface="Garet"/>
+                <a:ea typeface="Garet"/>
+                <a:cs typeface="Garet"/>
+                <a:sym typeface="Garet"/>
+              </a:rPr>
+              <a:t> i </a:t>
+            </a:r>
+            <a:r>
+              <a:rPr lang="en-US" sz="2800" spc="-78" dirty="0" err="1">
+                <a:solidFill>
+                  <a:srgbClr val="EBF5FE"/>
+                </a:solidFill>
+                <a:latin typeface="Garet"/>
+                <a:ea typeface="Garet"/>
+                <a:cs typeface="Garet"/>
+                <a:sym typeface="Garet"/>
+              </a:rPr>
+              <a:t>module_exit</a:t>
+            </a:r>
+            <a:r>
+              <a:rPr lang="en-US" sz="2800" spc="-78" dirty="0">
+                <a:solidFill>
+                  <a:srgbClr val="EBF5FE"/>
+                </a:solidFill>
+                <a:latin typeface="Garet"/>
+                <a:ea typeface="Garet"/>
+                <a:cs typeface="Garet"/>
+                <a:sym typeface="Garet"/>
+              </a:rPr>
+              <a:t> </a:t>
+            </a:r>
+            <a:r>
+              <a:rPr lang="en-US" sz="2800" spc="-78" dirty="0" err="1">
+                <a:solidFill>
+                  <a:srgbClr val="EBF5FE"/>
+                </a:solidFill>
+                <a:latin typeface="Garet"/>
+                <a:ea typeface="Garet"/>
+                <a:cs typeface="Garet"/>
+                <a:sym typeface="Garet"/>
+              </a:rPr>
+              <a:t>funkcije</a:t>
+            </a:r>
+            <a:r>
+              <a:rPr lang="en-US" sz="2800" spc="-78" dirty="0">
+                <a:solidFill>
+                  <a:srgbClr val="EBF5FE"/>
+                </a:solidFill>
+                <a:latin typeface="Garet"/>
+                <a:ea typeface="Garet"/>
+                <a:cs typeface="Garet"/>
+                <a:sym typeface="Garet"/>
+              </a:rPr>
+              <a:t> </a:t>
+            </a:r>
+            <a:r>
+              <a:rPr lang="en-US" sz="2800" spc="-78" dirty="0" err="1">
+                <a:solidFill>
+                  <a:srgbClr val="EBF5FE"/>
+                </a:solidFill>
+                <a:latin typeface="Garet"/>
+                <a:ea typeface="Garet"/>
+                <a:cs typeface="Garet"/>
+                <a:sym typeface="Garet"/>
+              </a:rPr>
+              <a:t>upravljaju</a:t>
+            </a:r>
+            <a:r>
+              <a:rPr lang="en-US" sz="2800" spc="-78" dirty="0">
+                <a:solidFill>
+                  <a:srgbClr val="EBF5FE"/>
+                </a:solidFill>
+                <a:latin typeface="Garet"/>
+                <a:ea typeface="Garet"/>
+                <a:cs typeface="Garet"/>
+                <a:sym typeface="Garet"/>
+              </a:rPr>
+              <a:t> </a:t>
+            </a:r>
+            <a:r>
+              <a:rPr lang="en-US" sz="2800" spc="-78" dirty="0" err="1">
+                <a:solidFill>
+                  <a:srgbClr val="EBF5FE"/>
+                </a:solidFill>
+                <a:latin typeface="Garet"/>
+                <a:ea typeface="Garet"/>
+                <a:cs typeface="Garet"/>
+                <a:sym typeface="Garet"/>
+              </a:rPr>
+              <a:t>životnim</a:t>
+            </a:r>
+            <a:r>
+              <a:rPr lang="en-US" sz="2800" spc="-78" dirty="0">
+                <a:solidFill>
+                  <a:srgbClr val="EBF5FE"/>
+                </a:solidFill>
+                <a:latin typeface="Garet"/>
+                <a:ea typeface="Garet"/>
+                <a:cs typeface="Garet"/>
+                <a:sym typeface="Garet"/>
+              </a:rPr>
+              <a:t> </a:t>
+            </a:r>
+            <a:r>
+              <a:rPr lang="en-US" sz="2800" spc="-78" dirty="0" err="1">
+                <a:solidFill>
+                  <a:srgbClr val="EBF5FE"/>
+                </a:solidFill>
+                <a:latin typeface="Garet"/>
+                <a:ea typeface="Garet"/>
+                <a:cs typeface="Garet"/>
+                <a:sym typeface="Garet"/>
+              </a:rPr>
+              <a:t>ciklusom</a:t>
+            </a:r>
+            <a:r>
+              <a:rPr lang="en-US" sz="2800" spc="-78" dirty="0">
+                <a:solidFill>
+                  <a:srgbClr val="EBF5FE"/>
+                </a:solidFill>
+                <a:latin typeface="Garet"/>
+                <a:ea typeface="Garet"/>
+                <a:cs typeface="Garet"/>
+                <a:sym typeface="Garet"/>
+              </a:rPr>
+              <a:t> </a:t>
+            </a:r>
+            <a:r>
+              <a:rPr lang="en-US" sz="2800" spc="-78" dirty="0" err="1">
                 <a:solidFill>
                   <a:srgbClr val="EBF5FE"/>
                 </a:solidFill>
@@ -22011,34 +23140,303 @@
               <a:t>modula</a:t>
             </a:r>
             <a:r>
-              <a:rPr lang="en-US" sz="2800" b="1" spc="-78" dirty="0">
-                <a:solidFill>
-                  <a:srgbClr val="EBF5FE"/>
-                </a:solidFill>
-                <a:latin typeface="Garet"/>
-                <a:ea typeface="Garet"/>
-                <a:cs typeface="Garet"/>
-                <a:sym typeface="Garet"/>
-              </a:rPr>
-              <a:t>: </a:t>
-            </a:r>
-            <a:endParaRPr lang="sr-Latn-RS" sz="2800" b="1" spc="-78" dirty="0">
-              <a:solidFill>
-                <a:srgbClr val="EBF5FE"/>
-              </a:solidFill>
-              <a:latin typeface="Garet"/>
-              <a:ea typeface="Garet"/>
-              <a:cs typeface="Garet"/>
-              <a:sym typeface="Garet"/>
-            </a:endParaRPr>
+              <a:rPr lang="en-US" sz="2800" spc="-78" dirty="0">
+                <a:solidFill>
+                  <a:srgbClr val="EBF5FE"/>
+                </a:solidFill>
+                <a:latin typeface="Garet"/>
+                <a:ea typeface="Garet"/>
+                <a:cs typeface="Garet"/>
+                <a:sym typeface="Garet"/>
+              </a:rPr>
+              <a:t>, </a:t>
+            </a:r>
+            <a:r>
+              <a:rPr lang="en-US" sz="2800" spc="-78" dirty="0" err="1">
+                <a:solidFill>
+                  <a:srgbClr val="EBF5FE"/>
+                </a:solidFill>
+                <a:latin typeface="Garet"/>
+                <a:ea typeface="Garet"/>
+                <a:cs typeface="Garet"/>
+                <a:sym typeface="Garet"/>
+              </a:rPr>
+              <a:t>uz</a:t>
+            </a:r>
+            <a:r>
+              <a:rPr lang="en-US" sz="2800" spc="-78" dirty="0">
+                <a:solidFill>
+                  <a:srgbClr val="EBF5FE"/>
+                </a:solidFill>
+                <a:latin typeface="Garet"/>
+                <a:ea typeface="Garet"/>
+                <a:cs typeface="Garet"/>
+                <a:sym typeface="Garet"/>
+              </a:rPr>
+              <a:t> </a:t>
+            </a:r>
+            <a:r>
+              <a:rPr lang="en-US" sz="2800" spc="-78" dirty="0" err="1">
+                <a:solidFill>
+                  <a:srgbClr val="EBF5FE"/>
+                </a:solidFill>
+                <a:latin typeface="Garet"/>
+                <a:ea typeface="Garet"/>
+                <a:cs typeface="Garet"/>
+                <a:sym typeface="Garet"/>
+              </a:rPr>
+              <a:t>automatsko</a:t>
+            </a:r>
+            <a:r>
+              <a:rPr lang="en-US" sz="2800" spc="-78" dirty="0">
+                <a:solidFill>
+                  <a:srgbClr val="EBF5FE"/>
+                </a:solidFill>
+                <a:latin typeface="Garet"/>
+                <a:ea typeface="Garet"/>
+                <a:cs typeface="Garet"/>
+                <a:sym typeface="Garet"/>
+              </a:rPr>
+              <a:t> </a:t>
+            </a:r>
+            <a:r>
+              <a:rPr lang="en-US" sz="2800" spc="-78" dirty="0" err="1">
+                <a:solidFill>
+                  <a:srgbClr val="EBF5FE"/>
+                </a:solidFill>
+                <a:latin typeface="Garet"/>
+                <a:ea typeface="Garet"/>
+                <a:cs typeface="Garet"/>
+                <a:sym typeface="Garet"/>
+              </a:rPr>
+              <a:t>kreiranje</a:t>
+            </a:r>
+            <a:r>
+              <a:rPr lang="en-US" sz="2800" spc="-78" dirty="0">
+                <a:solidFill>
+                  <a:srgbClr val="EBF5FE"/>
+                </a:solidFill>
+                <a:latin typeface="Garet"/>
+                <a:ea typeface="Garet"/>
+                <a:cs typeface="Garet"/>
+                <a:sym typeface="Garet"/>
+              </a:rPr>
+              <a:t> (</a:t>
+            </a:r>
+            <a:r>
+              <a:rPr lang="en-US" sz="2800" spc="-78" dirty="0" err="1">
+                <a:solidFill>
+                  <a:srgbClr val="EBF5FE"/>
+                </a:solidFill>
+                <a:latin typeface="Garet"/>
+                <a:ea typeface="Garet"/>
+                <a:cs typeface="Garet"/>
+                <a:sym typeface="Garet"/>
+              </a:rPr>
+              <a:t>kobject_create_and_add</a:t>
+            </a:r>
+            <a:r>
+              <a:rPr lang="en-US" sz="2800" spc="-78" dirty="0">
+                <a:solidFill>
+                  <a:srgbClr val="EBF5FE"/>
+                </a:solidFill>
+                <a:latin typeface="Garet"/>
+                <a:ea typeface="Garet"/>
+                <a:cs typeface="Garet"/>
+                <a:sym typeface="Garet"/>
+              </a:rPr>
+              <a:t>) i </a:t>
+            </a:r>
+            <a:r>
+              <a:rPr lang="en-US" sz="2800" spc="-78" dirty="0" err="1">
+                <a:solidFill>
+                  <a:srgbClr val="EBF5FE"/>
+                </a:solidFill>
+                <a:latin typeface="Garet"/>
+                <a:ea typeface="Garet"/>
+                <a:cs typeface="Garet"/>
+                <a:sym typeface="Garet"/>
+              </a:rPr>
+              <a:t>uklanjanje</a:t>
+            </a:r>
+            <a:r>
+              <a:rPr lang="en-US" sz="2800" spc="-78" dirty="0">
+                <a:solidFill>
+                  <a:srgbClr val="EBF5FE"/>
+                </a:solidFill>
+                <a:latin typeface="Garet"/>
+                <a:ea typeface="Garet"/>
+                <a:cs typeface="Garet"/>
+                <a:sym typeface="Garet"/>
+              </a:rPr>
+              <a:t> </a:t>
+            </a:r>
+            <a:r>
+              <a:rPr lang="en-US" sz="2800" spc="-78" dirty="0" err="1">
+                <a:solidFill>
+                  <a:srgbClr val="EBF5FE"/>
+                </a:solidFill>
+                <a:latin typeface="Garet"/>
+                <a:ea typeface="Garet"/>
+                <a:cs typeface="Garet"/>
+                <a:sym typeface="Garet"/>
+              </a:rPr>
+              <a:t>SysFS</a:t>
+            </a:r>
+            <a:r>
+              <a:rPr lang="en-US" sz="2800" spc="-78" dirty="0">
+                <a:solidFill>
+                  <a:srgbClr val="EBF5FE"/>
+                </a:solidFill>
+                <a:latin typeface="Garet"/>
+                <a:ea typeface="Garet"/>
+                <a:cs typeface="Garet"/>
+                <a:sym typeface="Garet"/>
+              </a:rPr>
+              <a:t> </a:t>
+            </a:r>
+            <a:r>
+              <a:rPr lang="en-US" sz="2800" spc="-78" dirty="0" err="1">
+                <a:solidFill>
+                  <a:srgbClr val="EBF5FE"/>
+                </a:solidFill>
+                <a:latin typeface="Garet"/>
+                <a:ea typeface="Garet"/>
+                <a:cs typeface="Garet"/>
+                <a:sym typeface="Garet"/>
+              </a:rPr>
+              <a:t>čvora</a:t>
+            </a:r>
+            <a:r>
+              <a:rPr lang="en-US" sz="2800" spc="-78" dirty="0">
+                <a:solidFill>
+                  <a:srgbClr val="EBF5FE"/>
+                </a:solidFill>
+                <a:latin typeface="Garet"/>
+                <a:ea typeface="Garet"/>
+                <a:cs typeface="Garet"/>
+                <a:sym typeface="Garet"/>
+              </a:rPr>
+              <a:t> </a:t>
+            </a:r>
+            <a:r>
+              <a:rPr lang="en-US" sz="2800" spc="-78" dirty="0" err="1">
+                <a:solidFill>
+                  <a:srgbClr val="EBF5FE"/>
+                </a:solidFill>
+                <a:latin typeface="Garet"/>
+                <a:ea typeface="Garet"/>
+                <a:cs typeface="Garet"/>
+                <a:sym typeface="Garet"/>
+              </a:rPr>
+              <a:t>iz</a:t>
+            </a:r>
+            <a:r>
+              <a:rPr lang="en-US" sz="2800" spc="-78" dirty="0">
+                <a:solidFill>
+                  <a:srgbClr val="EBF5FE"/>
+                </a:solidFill>
+                <a:latin typeface="Garet"/>
+                <a:ea typeface="Garet"/>
+                <a:cs typeface="Garet"/>
+                <a:sym typeface="Garet"/>
+              </a:rPr>
+              <a:t> </a:t>
+            </a:r>
+            <a:r>
+              <a:rPr lang="en-US" sz="2800" spc="-78" dirty="0" err="1">
+                <a:solidFill>
+                  <a:srgbClr val="EBF5FE"/>
+                </a:solidFill>
+                <a:latin typeface="Garet"/>
+                <a:ea typeface="Garet"/>
+                <a:cs typeface="Garet"/>
+                <a:sym typeface="Garet"/>
+              </a:rPr>
+              <a:t>memorije</a:t>
+            </a:r>
+            <a:r>
+              <a:rPr lang="en-US" sz="2800" spc="-78" dirty="0">
+                <a:solidFill>
+                  <a:srgbClr val="EBF5FE"/>
+                </a:solidFill>
+                <a:latin typeface="Garet"/>
+                <a:ea typeface="Garet"/>
+                <a:cs typeface="Garet"/>
+                <a:sym typeface="Garet"/>
+              </a:rPr>
+              <a:t>.  </a:t>
+            </a:r>
           </a:p>
           <a:p>
-            <a:pPr>
+            <a:pPr marL="457200" indent="-457200">
               <a:spcBef>
                 <a:spcPct val="0"/>
               </a:spcBef>
+              <a:buFont typeface="Arial" panose="020B0604020202020204" pitchFamily="34" charset="0"/>
+              <a:buChar char="•"/>
             </a:pPr>
             <a:r>
+              <a:rPr lang="en-US" sz="2800" b="1" spc="-78" dirty="0">
+                <a:solidFill>
+                  <a:srgbClr val="EBF5FE"/>
+                </a:solidFill>
+                <a:latin typeface="Garet"/>
+                <a:ea typeface="Garet"/>
+                <a:cs typeface="Garet"/>
+                <a:sym typeface="Garet"/>
+              </a:rPr>
+              <a:t>Build </a:t>
+            </a:r>
+            <a:r>
+              <a:rPr lang="en-US" sz="2800" b="1" spc="-78" dirty="0" err="1">
+                <a:solidFill>
+                  <a:srgbClr val="EBF5FE"/>
+                </a:solidFill>
+                <a:latin typeface="Garet"/>
+                <a:ea typeface="Garet"/>
+                <a:cs typeface="Garet"/>
+                <a:sym typeface="Garet"/>
+              </a:rPr>
+              <a:t>sistem</a:t>
+            </a:r>
+            <a:r>
+              <a:rPr lang="en-US" sz="2800" b="1" spc="-78" dirty="0">
+                <a:solidFill>
+                  <a:srgbClr val="EBF5FE"/>
+                </a:solidFill>
+                <a:latin typeface="Garet"/>
+                <a:ea typeface="Garet"/>
+                <a:cs typeface="Garet"/>
+                <a:sym typeface="Garet"/>
+              </a:rPr>
+              <a:t> (</a:t>
+            </a:r>
+            <a:r>
+              <a:rPr lang="en-US" sz="2800" b="1" spc="-78" dirty="0" err="1">
+                <a:solidFill>
+                  <a:srgbClr val="EBF5FE"/>
+                </a:solidFill>
+                <a:latin typeface="Garet"/>
+                <a:ea typeface="Garet"/>
+                <a:cs typeface="Garet"/>
+                <a:sym typeface="Garet"/>
+              </a:rPr>
+              <a:t>Makefile</a:t>
+            </a:r>
+            <a:r>
+              <a:rPr lang="en-US" sz="2800" b="1" spc="-78" dirty="0">
+                <a:solidFill>
+                  <a:srgbClr val="EBF5FE"/>
+                </a:solidFill>
+                <a:latin typeface="Garet"/>
+                <a:ea typeface="Garet"/>
+                <a:cs typeface="Garet"/>
+                <a:sym typeface="Garet"/>
+              </a:rPr>
+              <a:t>): </a:t>
+            </a:r>
+            <a:r>
               <a:rPr lang="en-US" sz="2800" spc="-78" dirty="0" err="1">
                 <a:solidFill>
                   <a:srgbClr val="EBF5FE"/>
@@ -22060,374 +23458,106 @@
                 <a:cs typeface="Garet"/>
                 <a:sym typeface="Garet"/>
               </a:rPr>
-              <a:t> je </a:t>
-            </a:r>
-            <a:r>
-              <a:rPr lang="en-US" sz="2800" i="1" spc="-78" dirty="0" err="1">
-                <a:solidFill>
-                  <a:srgbClr val="EBF5FE"/>
-                </a:solidFill>
-                <a:latin typeface="Garet"/>
-                <a:ea typeface="Garet"/>
-                <a:cs typeface="Garet"/>
-                <a:sym typeface="Garet"/>
-              </a:rPr>
-              <a:t>module_param</a:t>
-            </a:r>
-            <a:r>
-              <a:rPr lang="en-US" sz="2800" i="1" spc="-78" dirty="0">
-                <a:solidFill>
-                  <a:srgbClr val="EBF5FE"/>
-                </a:solidFill>
-                <a:latin typeface="Garet"/>
-                <a:ea typeface="Garet"/>
-                <a:cs typeface="Garet"/>
-                <a:sym typeface="Garet"/>
-              </a:rPr>
-              <a:t>(</a:t>
-            </a:r>
-            <a:r>
-              <a:rPr lang="en-US" sz="2800" i="1" spc="-78" dirty="0" err="1">
-                <a:solidFill>
-                  <a:srgbClr val="EBF5FE"/>
-                </a:solidFill>
-                <a:latin typeface="Garet"/>
-                <a:ea typeface="Garet"/>
-                <a:cs typeface="Garet"/>
-                <a:sym typeface="Garet"/>
-              </a:rPr>
-              <a:t>target_path</a:t>
-            </a:r>
-            <a:r>
-              <a:rPr lang="en-US" sz="2800" i="1" spc="-78" dirty="0">
-                <a:solidFill>
-                  <a:srgbClr val="EBF5FE"/>
-                </a:solidFill>
-                <a:latin typeface="Garet"/>
-                <a:ea typeface="Garet"/>
-                <a:cs typeface="Garet"/>
-                <a:sym typeface="Garet"/>
-              </a:rPr>
-              <a:t>, </a:t>
-            </a:r>
-            <a:r>
-              <a:rPr lang="en-US" sz="2800" i="1" spc="-78" dirty="0" err="1">
-                <a:solidFill>
-                  <a:srgbClr val="EBF5FE"/>
-                </a:solidFill>
-                <a:latin typeface="Garet"/>
-                <a:ea typeface="Garet"/>
-                <a:cs typeface="Garet"/>
-                <a:sym typeface="Garet"/>
-              </a:rPr>
-              <a:t>charp</a:t>
-            </a:r>
-            <a:r>
-              <a:rPr lang="en-US" sz="2800" i="1" spc="-78" dirty="0">
-                <a:solidFill>
-                  <a:srgbClr val="EBF5FE"/>
-                </a:solidFill>
-                <a:latin typeface="Garet"/>
-                <a:ea typeface="Garet"/>
-                <a:cs typeface="Garet"/>
-                <a:sym typeface="Garet"/>
-              </a:rPr>
-              <a:t>, 0444)</a:t>
-            </a:r>
-            <a:r>
-              <a:rPr lang="en-US" sz="2800" spc="-78" dirty="0">
-                <a:solidFill>
-                  <a:srgbClr val="EBF5FE"/>
-                </a:solidFill>
-                <a:latin typeface="Garet"/>
-                <a:ea typeface="Garet"/>
-                <a:cs typeface="Garet"/>
-                <a:sym typeface="Garet"/>
-              </a:rPr>
-              <a:t> koji </a:t>
-            </a:r>
-            <a:r>
-              <a:rPr lang="en-US" sz="2800" spc="-78" dirty="0" err="1">
-                <a:solidFill>
-                  <a:srgbClr val="EBF5FE"/>
-                </a:solidFill>
-                <a:latin typeface="Garet"/>
-                <a:ea typeface="Garet"/>
-                <a:cs typeface="Garet"/>
-                <a:sym typeface="Garet"/>
-              </a:rPr>
-              <a:t>dozvoljava</a:t>
-            </a:r>
-            <a:r>
-              <a:rPr lang="en-US" sz="2800" spc="-78" dirty="0">
-                <a:solidFill>
-                  <a:srgbClr val="EBF5FE"/>
-                </a:solidFill>
-                <a:latin typeface="Garet"/>
-                <a:ea typeface="Garet"/>
-                <a:cs typeface="Garet"/>
-                <a:sym typeface="Garet"/>
-              </a:rPr>
-              <a:t> </a:t>
-            </a:r>
-            <a:r>
-              <a:rPr lang="en-US" sz="2800" spc="-78" dirty="0" err="1">
-                <a:solidFill>
-                  <a:srgbClr val="EBF5FE"/>
-                </a:solidFill>
-                <a:latin typeface="Garet"/>
-                <a:ea typeface="Garet"/>
-                <a:cs typeface="Garet"/>
-                <a:sym typeface="Garet"/>
-              </a:rPr>
-              <a:t>korisniku</a:t>
-            </a:r>
-            <a:r>
-              <a:rPr lang="en-US" sz="2800" spc="-78" dirty="0">
-                <a:solidFill>
-                  <a:srgbClr val="EBF5FE"/>
-                </a:solidFill>
-                <a:latin typeface="Garet"/>
-                <a:ea typeface="Garet"/>
-                <a:cs typeface="Garet"/>
-                <a:sym typeface="Garet"/>
-              </a:rPr>
-              <a:t> da </a:t>
-            </a:r>
-            <a:r>
-              <a:rPr lang="en-US" sz="2800" spc="-78" dirty="0" err="1">
-                <a:solidFill>
-                  <a:srgbClr val="EBF5FE"/>
-                </a:solidFill>
-                <a:latin typeface="Garet"/>
-                <a:ea typeface="Garet"/>
-                <a:cs typeface="Garet"/>
-                <a:sym typeface="Garet"/>
-              </a:rPr>
-              <a:t>pri</a:t>
-            </a:r>
-            <a:r>
-              <a:rPr lang="en-US" sz="2800" spc="-78" dirty="0">
-                <a:solidFill>
-                  <a:srgbClr val="EBF5FE"/>
-                </a:solidFill>
-                <a:latin typeface="Garet"/>
-                <a:ea typeface="Garet"/>
-                <a:cs typeface="Garet"/>
-                <a:sym typeface="Garet"/>
-              </a:rPr>
-              <a:t> </a:t>
-            </a:r>
-            <a:r>
-              <a:rPr lang="en-US" sz="2800" spc="-78" dirty="0" err="1">
-                <a:solidFill>
-                  <a:srgbClr val="EBF5FE"/>
-                </a:solidFill>
-                <a:latin typeface="Garet"/>
-                <a:ea typeface="Garet"/>
-                <a:cs typeface="Garet"/>
-                <a:sym typeface="Garet"/>
-              </a:rPr>
-              <a:t>učitavanju</a:t>
-            </a:r>
-            <a:r>
-              <a:rPr lang="en-US" sz="2800" spc="-78" dirty="0">
-                <a:solidFill>
-                  <a:srgbClr val="EBF5FE"/>
-                </a:solidFill>
-                <a:latin typeface="Garet"/>
-                <a:ea typeface="Garet"/>
-                <a:cs typeface="Garet"/>
-                <a:sym typeface="Garet"/>
-              </a:rPr>
-              <a:t> </a:t>
-            </a:r>
-            <a:r>
-              <a:rPr lang="en-US" sz="2800" spc="-78" dirty="0" err="1">
-                <a:solidFill>
-                  <a:srgbClr val="EBF5FE"/>
-                </a:solidFill>
-                <a:latin typeface="Garet"/>
-                <a:ea typeface="Garet"/>
-                <a:cs typeface="Garet"/>
-                <a:sym typeface="Garet"/>
-              </a:rPr>
-              <a:t>modula</a:t>
-            </a:r>
-            <a:r>
-              <a:rPr lang="en-US" sz="2800" spc="-78" dirty="0">
-                <a:solidFill>
-                  <a:srgbClr val="EBF5FE"/>
-                </a:solidFill>
-                <a:latin typeface="Garet"/>
-                <a:ea typeface="Garet"/>
-                <a:cs typeface="Garet"/>
-                <a:sym typeface="Garet"/>
-              </a:rPr>
-              <a:t> </a:t>
-            </a:r>
-            <a:r>
-              <a:rPr lang="en-US" sz="2800" spc="-78" dirty="0" err="1">
-                <a:solidFill>
-                  <a:srgbClr val="EBF5FE"/>
-                </a:solidFill>
-                <a:latin typeface="Garet"/>
-                <a:ea typeface="Garet"/>
-                <a:cs typeface="Garet"/>
-                <a:sym typeface="Garet"/>
-              </a:rPr>
-              <a:t>definiše</a:t>
-            </a:r>
-            <a:r>
-              <a:rPr lang="en-US" sz="2800" spc="-78" dirty="0">
-                <a:solidFill>
-                  <a:srgbClr val="EBF5FE"/>
-                </a:solidFill>
-                <a:latin typeface="Garet"/>
-                <a:ea typeface="Garet"/>
-                <a:cs typeface="Garet"/>
-                <a:sym typeface="Garet"/>
-              </a:rPr>
-              <a:t> </a:t>
-            </a:r>
-            <a:r>
-              <a:rPr lang="en-US" sz="2800" spc="-78" dirty="0" err="1">
-                <a:solidFill>
-                  <a:srgbClr val="EBF5FE"/>
-                </a:solidFill>
-                <a:latin typeface="Garet"/>
-                <a:ea typeface="Garet"/>
-                <a:cs typeface="Garet"/>
-                <a:sym typeface="Garet"/>
-              </a:rPr>
-              <a:t>fajl</a:t>
-            </a:r>
-            <a:r>
-              <a:rPr lang="en-US" sz="2800" spc="-78" dirty="0">
-                <a:solidFill>
-                  <a:srgbClr val="EBF5FE"/>
-                </a:solidFill>
-                <a:latin typeface="Garet"/>
-                <a:ea typeface="Garet"/>
-                <a:cs typeface="Garet"/>
-                <a:sym typeface="Garet"/>
-              </a:rPr>
-              <a:t> koji </a:t>
-            </a:r>
-            <a:r>
-              <a:rPr lang="en-US" sz="2800" spc="-78" dirty="0" err="1">
-                <a:solidFill>
-                  <a:srgbClr val="EBF5FE"/>
-                </a:solidFill>
-                <a:latin typeface="Garet"/>
-                <a:ea typeface="Garet"/>
-                <a:cs typeface="Garet"/>
-                <a:sym typeface="Garet"/>
-              </a:rPr>
-              <a:t>želi</a:t>
-            </a:r>
-            <a:r>
-              <a:rPr lang="en-US" sz="2800" spc="-78" dirty="0">
-                <a:solidFill>
-                  <a:srgbClr val="EBF5FE"/>
-                </a:solidFill>
-                <a:latin typeface="Garet"/>
-                <a:ea typeface="Garet"/>
-                <a:cs typeface="Garet"/>
-                <a:sym typeface="Garet"/>
-              </a:rPr>
-              <a:t> da </a:t>
-            </a:r>
-            <a:r>
-              <a:rPr lang="en-US" sz="2800" spc="-78" dirty="0" err="1">
-                <a:solidFill>
-                  <a:srgbClr val="EBF5FE"/>
-                </a:solidFill>
-                <a:latin typeface="Garet"/>
-                <a:ea typeface="Garet"/>
-                <a:cs typeface="Garet"/>
-                <a:sym typeface="Garet"/>
-              </a:rPr>
-              <a:t>prati</a:t>
-            </a:r>
-            <a:r>
-              <a:rPr lang="en-US" sz="2800" spc="-78" dirty="0">
-                <a:solidFill>
-                  <a:srgbClr val="EBF5FE"/>
-                </a:solidFill>
-                <a:latin typeface="Garet"/>
-                <a:ea typeface="Garet"/>
-                <a:cs typeface="Garet"/>
-                <a:sym typeface="Garet"/>
-              </a:rPr>
-              <a:t>:</a:t>
-            </a:r>
-            <a:endParaRPr lang="sr-Latn-RS" sz="2800" spc="-78" dirty="0">
-              <a:solidFill>
-                <a:srgbClr val="EBF5FE"/>
-              </a:solidFill>
-              <a:latin typeface="Garet"/>
-              <a:ea typeface="Garet"/>
-              <a:cs typeface="Garet"/>
-              <a:sym typeface="Garet"/>
-            </a:endParaRPr>
-          </a:p>
-          <a:p>
-            <a:pPr>
-              <a:spcBef>
-                <a:spcPct val="0"/>
-              </a:spcBef>
-            </a:pPr>
-            <a:r>
-              <a:rPr lang="en-US" sz="2800" i="1" spc="-78" dirty="0" err="1">
-                <a:solidFill>
-                  <a:srgbClr val="EBF5FE"/>
-                </a:solidFill>
-                <a:latin typeface="Garet"/>
-                <a:ea typeface="Garet"/>
-                <a:cs typeface="Garet"/>
-                <a:sym typeface="Garet"/>
-              </a:rPr>
-              <a:t>sudo</a:t>
-            </a:r>
-            <a:r>
-              <a:rPr lang="en-US" sz="2800" i="1" spc="-78" dirty="0">
-                <a:solidFill>
-                  <a:srgbClr val="EBF5FE"/>
-                </a:solidFill>
-                <a:latin typeface="Garet"/>
-                <a:ea typeface="Garet"/>
-                <a:cs typeface="Garet"/>
-                <a:sym typeface="Garet"/>
-              </a:rPr>
-              <a:t> </a:t>
-            </a:r>
-            <a:r>
-              <a:rPr lang="en-US" sz="2800" i="1" spc="-78" dirty="0" err="1">
-                <a:solidFill>
-                  <a:srgbClr val="EBF5FE"/>
-                </a:solidFill>
-                <a:latin typeface="Garet"/>
-                <a:ea typeface="Garet"/>
-                <a:cs typeface="Garet"/>
-                <a:sym typeface="Garet"/>
-              </a:rPr>
-              <a:t>insmod</a:t>
-            </a:r>
-            <a:r>
-              <a:rPr lang="en-US" sz="2800" i="1" spc="-78" dirty="0">
-                <a:solidFill>
-                  <a:srgbClr val="EBF5FE"/>
-                </a:solidFill>
-                <a:latin typeface="Garet"/>
-                <a:ea typeface="Garet"/>
-                <a:cs typeface="Garet"/>
-                <a:sym typeface="Garet"/>
-              </a:rPr>
-              <a:t> </a:t>
-            </a:r>
-            <a:r>
-              <a:rPr lang="en-US" sz="2800" i="1" spc="-78" dirty="0" err="1">
+              <a:t> obj-m </a:t>
+            </a:r>
+            <a:r>
+              <a:rPr lang="en-US" sz="2800" spc="-78" dirty="0" err="1">
+                <a:solidFill>
+                  <a:srgbClr val="EBF5FE"/>
+                </a:solidFill>
+                <a:latin typeface="Garet"/>
+                <a:ea typeface="Garet"/>
+                <a:cs typeface="Garet"/>
+                <a:sym typeface="Garet"/>
+              </a:rPr>
+              <a:t>sistem</a:t>
+            </a:r>
+            <a:r>
+              <a:rPr lang="en-US" sz="2800" spc="-78" dirty="0">
+                <a:solidFill>
+                  <a:srgbClr val="EBF5FE"/>
+                </a:solidFill>
+                <a:latin typeface="Garet"/>
+                <a:ea typeface="Garet"/>
+                <a:cs typeface="Garet"/>
+                <a:sym typeface="Garet"/>
+              </a:rPr>
+              <a:t> za </a:t>
+            </a:r>
+            <a:r>
+              <a:rPr lang="en-US" sz="2800" spc="-78" dirty="0" err="1">
+                <a:solidFill>
+                  <a:srgbClr val="EBF5FE"/>
+                </a:solidFill>
+                <a:latin typeface="Garet"/>
+                <a:ea typeface="Garet"/>
+                <a:cs typeface="Garet"/>
+                <a:sym typeface="Garet"/>
+              </a:rPr>
+              <a:t>pretvaranje</a:t>
+            </a:r>
+            <a:r>
+              <a:rPr lang="en-US" sz="2800" spc="-78" dirty="0">
+                <a:solidFill>
+                  <a:srgbClr val="EBF5FE"/>
+                </a:solidFill>
+                <a:latin typeface="Garet"/>
+                <a:ea typeface="Garet"/>
+                <a:cs typeface="Garet"/>
+                <a:sym typeface="Garet"/>
+              </a:rPr>
+              <a:t> </a:t>
+            </a:r>
+            <a:r>
+              <a:rPr lang="en-US" sz="2800" spc="-78" dirty="0" err="1">
+                <a:solidFill>
+                  <a:srgbClr val="EBF5FE"/>
+                </a:solidFill>
+                <a:latin typeface="Garet"/>
+                <a:ea typeface="Garet"/>
+                <a:cs typeface="Garet"/>
+                <a:sym typeface="Garet"/>
+              </a:rPr>
+              <a:t>koda</a:t>
+            </a:r>
+            <a:r>
+              <a:rPr lang="en-US" sz="2800" spc="-78" dirty="0">
+                <a:solidFill>
+                  <a:srgbClr val="EBF5FE"/>
+                </a:solidFill>
+                <a:latin typeface="Garet"/>
+                <a:ea typeface="Garet"/>
+                <a:cs typeface="Garet"/>
+                <a:sym typeface="Garet"/>
+              </a:rPr>
+              <a:t> u kernel </a:t>
+            </a:r>
+            <a:r>
+              <a:rPr lang="en-US" sz="2800" spc="-78" dirty="0" err="1">
+                <a:solidFill>
+                  <a:srgbClr val="EBF5FE"/>
+                </a:solidFill>
+                <a:latin typeface="Garet"/>
+                <a:ea typeface="Garet"/>
+                <a:cs typeface="Garet"/>
+                <a:sym typeface="Garet"/>
+              </a:rPr>
+              <a:t>modul</a:t>
+            </a:r>
+            <a:r>
+              <a:rPr lang="en-US" sz="2800" spc="-78" dirty="0">
+                <a:solidFill>
+                  <a:srgbClr val="EBF5FE"/>
+                </a:solidFill>
+                <a:latin typeface="Garet"/>
+                <a:ea typeface="Garet"/>
+                <a:cs typeface="Garet"/>
+                <a:sym typeface="Garet"/>
+              </a:rPr>
+              <a:t> (</a:t>
+            </a:r>
+            <a:r>
+              <a:rPr lang="en-US" sz="2800" spc="-78" dirty="0" err="1">
                 <a:solidFill>
                   <a:srgbClr val="EBF5FE"/>
                 </a:solidFill>
@@ -22439,599 +23569,160 @@
               <a:t>file_monitor.ko</a:t>
             </a:r>
             <a:r>
-              <a:rPr lang="sr-Latn-RS" sz="2800" i="1" spc="-78" dirty="0">
-                <a:solidFill>
-                  <a:srgbClr val="EBF5FE"/>
-                </a:solidFill>
-                <a:latin typeface="Garet"/>
-                <a:ea typeface="Garet"/>
-                <a:cs typeface="Garet"/>
-                <a:sym typeface="Garet"/>
-              </a:rPr>
-              <a:t> </a:t>
-            </a:r>
-            <a:r>
-              <a:rPr lang="en-US" sz="2800" i="1" spc="-78" dirty="0" err="1">
-                <a:solidFill>
-                  <a:srgbClr val="EBF5FE"/>
-                </a:solidFill>
-                <a:latin typeface="Garet"/>
-                <a:ea typeface="Garet"/>
-                <a:cs typeface="Garet"/>
-                <a:sym typeface="Garet"/>
-              </a:rPr>
-              <a:t>target_path</a:t>
-            </a:r>
-            <a:r>
-              <a:rPr lang="en-US" sz="2800" i="1" spc="-78" dirty="0">
-                <a:solidFill>
-                  <a:srgbClr val="EBF5FE"/>
-                </a:solidFill>
-                <a:latin typeface="Garet"/>
-                <a:ea typeface="Garet"/>
-                <a:cs typeface="Garet"/>
-                <a:sym typeface="Garet"/>
-              </a:rPr>
-              <a:t>=</a:t>
-            </a:r>
-            <a:r>
-              <a:rPr lang="sr-Latn-RS" sz="2800" i="1" spc="-78" dirty="0">
-                <a:solidFill>
-                  <a:srgbClr val="EBF5FE"/>
-                </a:solidFill>
-                <a:latin typeface="Garet"/>
-                <a:ea typeface="Garet"/>
-                <a:cs typeface="Garet"/>
-                <a:sym typeface="Garet"/>
-              </a:rPr>
-              <a:t>„</a:t>
-            </a:r>
-            <a:r>
-              <a:rPr lang="en-US" sz="2800" i="1" spc="-78" dirty="0">
-                <a:solidFill>
-                  <a:srgbClr val="EBF5FE"/>
-                </a:solidFill>
-                <a:latin typeface="Garet"/>
-                <a:ea typeface="Garet"/>
-                <a:cs typeface="Garet"/>
-                <a:sym typeface="Garet"/>
-              </a:rPr>
-              <a:t>/</a:t>
-            </a:r>
-            <a:r>
-              <a:rPr lang="en-US" sz="2800" i="1" spc="-78" dirty="0" err="1">
-                <a:solidFill>
-                  <a:srgbClr val="EBF5FE"/>
-                </a:solidFill>
-                <a:latin typeface="Garet"/>
-                <a:ea typeface="Garet"/>
-                <a:cs typeface="Garet"/>
-                <a:sym typeface="Garet"/>
-              </a:rPr>
-              <a:t>putanja</a:t>
-            </a:r>
-            <a:r>
-              <a:rPr lang="en-US" sz="2800" i="1" spc="-78" dirty="0">
-                <a:solidFill>
-                  <a:srgbClr val="EBF5FE"/>
-                </a:solidFill>
-                <a:latin typeface="Garet"/>
-                <a:ea typeface="Garet"/>
-                <a:cs typeface="Garet"/>
-                <a:sym typeface="Garet"/>
-              </a:rPr>
-              <a:t>/</a:t>
-            </a:r>
-            <a:r>
-              <a:rPr lang="en-US" sz="2800" i="1" spc="-78" dirty="0" err="1">
-                <a:solidFill>
-                  <a:srgbClr val="EBF5FE"/>
-                </a:solidFill>
-                <a:latin typeface="Garet"/>
-                <a:ea typeface="Garet"/>
-                <a:cs typeface="Garet"/>
-                <a:sym typeface="Garet"/>
-              </a:rPr>
-              <a:t>fajla</a:t>
-            </a:r>
-            <a:r>
-              <a:rPr lang="sr-Latn-RS" sz="2800" i="1" spc="-78" dirty="0">
-                <a:solidFill>
-                  <a:srgbClr val="EBF5FE"/>
-                </a:solidFill>
-                <a:latin typeface="Garet"/>
-                <a:ea typeface="Garet"/>
-                <a:cs typeface="Garet"/>
-                <a:sym typeface="Garet"/>
-              </a:rPr>
-              <a:t>“</a:t>
-            </a:r>
-          </a:p>
-          <a:p>
-            <a:pPr>
-              <a:spcBef>
-                <a:spcPct val="0"/>
-              </a:spcBef>
-            </a:pPr>
-            <a:r>
-              <a:rPr lang="en-US" sz="2800" b="1" spc="-78" dirty="0">
-                <a:solidFill>
-                  <a:srgbClr val="EBF5FE"/>
-                </a:solidFill>
-                <a:latin typeface="Garet"/>
-                <a:ea typeface="Garet"/>
-                <a:cs typeface="Garet"/>
-                <a:sym typeface="Garet"/>
-              </a:rPr>
-              <a:t>Lifecycle: </a:t>
-            </a:r>
-            <a:endParaRPr lang="sr-Latn-RS" sz="2800" b="1" spc="-78" dirty="0">
-              <a:solidFill>
-                <a:srgbClr val="EBF5FE"/>
-              </a:solidFill>
-              <a:latin typeface="Garet"/>
-              <a:ea typeface="Garet"/>
-              <a:cs typeface="Garet"/>
-              <a:sym typeface="Garet"/>
-            </a:endParaRPr>
-          </a:p>
-          <a:p>
-            <a:pPr>
-              <a:spcBef>
-                <a:spcPct val="0"/>
-              </a:spcBef>
-            </a:pPr>
-            <a:r>
-              <a:rPr lang="en-US" sz="2800" spc="-78" dirty="0" err="1">
-                <a:solidFill>
-                  <a:srgbClr val="EBF5FE"/>
-                </a:solidFill>
-                <a:latin typeface="Garet"/>
-                <a:ea typeface="Garet"/>
-                <a:cs typeface="Garet"/>
-                <a:sym typeface="Garet"/>
-              </a:rPr>
-              <a:t>Standardne</a:t>
-            </a:r>
-            <a:r>
-              <a:rPr lang="en-US" sz="2800" spc="-78" dirty="0">
-                <a:solidFill>
-                  <a:srgbClr val="EBF5FE"/>
-                </a:solidFill>
-                <a:latin typeface="Garet"/>
-                <a:ea typeface="Garet"/>
-                <a:cs typeface="Garet"/>
-                <a:sym typeface="Garet"/>
-              </a:rPr>
-              <a:t> </a:t>
-            </a:r>
-            <a:r>
-              <a:rPr lang="en-US" sz="2800" i="1" spc="-78" dirty="0" err="1">
-                <a:solidFill>
-                  <a:srgbClr val="EBF5FE"/>
-                </a:solidFill>
-                <a:latin typeface="Garet"/>
-                <a:ea typeface="Garet"/>
-                <a:cs typeface="Garet"/>
-                <a:sym typeface="Garet"/>
-              </a:rPr>
-              <a:t>module_init</a:t>
-            </a:r>
-            <a:r>
-              <a:rPr lang="en-US" sz="2800" i="1" spc="-78" dirty="0">
-                <a:solidFill>
-                  <a:srgbClr val="EBF5FE"/>
-                </a:solidFill>
-                <a:latin typeface="Garet"/>
-                <a:ea typeface="Garet"/>
-                <a:cs typeface="Garet"/>
-                <a:sym typeface="Garet"/>
-              </a:rPr>
-              <a:t> </a:t>
-            </a:r>
-            <a:r>
-              <a:rPr lang="en-US" sz="2800" spc="-78" dirty="0">
-                <a:solidFill>
-                  <a:srgbClr val="EBF5FE"/>
-                </a:solidFill>
-                <a:latin typeface="Garet"/>
-                <a:ea typeface="Garet"/>
-                <a:cs typeface="Garet"/>
-                <a:sym typeface="Garet"/>
-              </a:rPr>
-              <a:t>i </a:t>
-            </a:r>
-            <a:r>
-              <a:rPr lang="en-US" sz="2800" i="1" spc="-78" dirty="0" err="1">
-                <a:solidFill>
-                  <a:srgbClr val="EBF5FE"/>
-                </a:solidFill>
-                <a:latin typeface="Garet"/>
-                <a:ea typeface="Garet"/>
-                <a:cs typeface="Garet"/>
-                <a:sym typeface="Garet"/>
-              </a:rPr>
-              <a:t>module_exit</a:t>
-            </a:r>
-            <a:r>
-              <a:rPr lang="en-US" sz="2800" spc="-78" dirty="0">
-                <a:solidFill>
-                  <a:srgbClr val="EBF5FE"/>
-                </a:solidFill>
-                <a:latin typeface="Garet"/>
-                <a:ea typeface="Garet"/>
-                <a:cs typeface="Garet"/>
-                <a:sym typeface="Garet"/>
-              </a:rPr>
-              <a:t> </a:t>
-            </a:r>
-            <a:r>
-              <a:rPr lang="en-US" sz="2800" spc="-78" dirty="0" err="1">
-                <a:solidFill>
-                  <a:srgbClr val="EBF5FE"/>
-                </a:solidFill>
-                <a:latin typeface="Garet"/>
-                <a:ea typeface="Garet"/>
-                <a:cs typeface="Garet"/>
-                <a:sym typeface="Garet"/>
-              </a:rPr>
-              <a:t>funkcije</a:t>
-            </a:r>
-            <a:r>
-              <a:rPr lang="en-US" sz="2800" spc="-78" dirty="0">
-                <a:solidFill>
-                  <a:srgbClr val="EBF5FE"/>
-                </a:solidFill>
-                <a:latin typeface="Garet"/>
-                <a:ea typeface="Garet"/>
-                <a:cs typeface="Garet"/>
-                <a:sym typeface="Garet"/>
-              </a:rPr>
-              <a:t> za </a:t>
-            </a:r>
-            <a:r>
-              <a:rPr lang="en-US" sz="2800" spc="-78" dirty="0" err="1">
-                <a:solidFill>
-                  <a:srgbClr val="EBF5FE"/>
-                </a:solidFill>
-                <a:latin typeface="Garet"/>
-                <a:ea typeface="Garet"/>
-                <a:cs typeface="Garet"/>
-                <a:sym typeface="Garet"/>
-              </a:rPr>
-              <a:t>upravljanje</a:t>
-            </a:r>
-            <a:r>
-              <a:rPr lang="en-US" sz="2800" spc="-78" dirty="0">
-                <a:solidFill>
-                  <a:srgbClr val="EBF5FE"/>
-                </a:solidFill>
-                <a:latin typeface="Garet"/>
-                <a:ea typeface="Garet"/>
-                <a:cs typeface="Garet"/>
-                <a:sym typeface="Garet"/>
-              </a:rPr>
-              <a:t> </a:t>
-            </a:r>
-            <a:r>
-              <a:rPr lang="en-US" sz="2800" spc="-78" dirty="0" err="1">
-                <a:solidFill>
-                  <a:srgbClr val="EBF5FE"/>
-                </a:solidFill>
-                <a:latin typeface="Garet"/>
-                <a:ea typeface="Garet"/>
-                <a:cs typeface="Garet"/>
-                <a:sym typeface="Garet"/>
-              </a:rPr>
-              <a:t>životnim</a:t>
-            </a:r>
-            <a:r>
-              <a:rPr lang="en-US" sz="2800" spc="-78" dirty="0">
-                <a:solidFill>
-                  <a:srgbClr val="EBF5FE"/>
-                </a:solidFill>
-                <a:latin typeface="Garet"/>
-                <a:ea typeface="Garet"/>
-                <a:cs typeface="Garet"/>
-                <a:sym typeface="Garet"/>
-              </a:rPr>
-              <a:t> </a:t>
-            </a:r>
-            <a:r>
-              <a:rPr lang="en-US" sz="2800" spc="-78" dirty="0" err="1">
-                <a:solidFill>
-                  <a:srgbClr val="EBF5FE"/>
-                </a:solidFill>
-                <a:latin typeface="Garet"/>
-                <a:ea typeface="Garet"/>
-                <a:cs typeface="Garet"/>
-                <a:sym typeface="Garet"/>
-              </a:rPr>
-              <a:t>ciklusom</a:t>
-            </a:r>
-            <a:r>
-              <a:rPr lang="en-US" sz="2800" spc="-78" dirty="0">
-                <a:solidFill>
-                  <a:srgbClr val="EBF5FE"/>
-                </a:solidFill>
-                <a:latin typeface="Garet"/>
-                <a:ea typeface="Garet"/>
-                <a:cs typeface="Garet"/>
-                <a:sym typeface="Garet"/>
-              </a:rPr>
-              <a:t> </a:t>
-            </a:r>
-            <a:r>
-              <a:rPr lang="en-US" sz="2800" spc="-78" dirty="0" err="1">
-                <a:solidFill>
-                  <a:srgbClr val="EBF5FE"/>
-                </a:solidFill>
-                <a:latin typeface="Garet"/>
-                <a:ea typeface="Garet"/>
-                <a:cs typeface="Garet"/>
-                <a:sym typeface="Garet"/>
-              </a:rPr>
-              <a:t>modula</a:t>
-            </a:r>
-            <a:r>
-              <a:rPr lang="en-US" sz="2800" spc="-78" dirty="0">
-                <a:solidFill>
-                  <a:srgbClr val="EBF5FE"/>
-                </a:solidFill>
-                <a:latin typeface="Garet"/>
-                <a:ea typeface="Garet"/>
-                <a:cs typeface="Garet"/>
-                <a:sym typeface="Garet"/>
-              </a:rPr>
-              <a:t> u </a:t>
-            </a:r>
-            <a:r>
-              <a:rPr lang="en-US" sz="2800" spc="-78" dirty="0" err="1">
-                <a:solidFill>
-                  <a:srgbClr val="EBF5FE"/>
-                </a:solidFill>
-                <a:latin typeface="Garet"/>
-                <a:ea typeface="Garet"/>
-                <a:cs typeface="Garet"/>
-                <a:sym typeface="Garet"/>
-              </a:rPr>
-              <a:t>memoriji</a:t>
-            </a:r>
-            <a:r>
-              <a:rPr lang="en-US" sz="2800" spc="-78" dirty="0">
-                <a:solidFill>
-                  <a:srgbClr val="EBF5FE"/>
-                </a:solidFill>
-                <a:latin typeface="Garet"/>
-                <a:ea typeface="Garet"/>
-                <a:cs typeface="Garet"/>
-                <a:sym typeface="Garet"/>
-              </a:rPr>
-              <a:t>.</a:t>
-            </a:r>
-            <a:endParaRPr lang="sr-Latn-RS" sz="2800" spc="-78" dirty="0">
-              <a:solidFill>
-                <a:srgbClr val="EBF5FE"/>
-              </a:solidFill>
-              <a:latin typeface="Garet"/>
-              <a:ea typeface="Garet"/>
-              <a:cs typeface="Garet"/>
-              <a:sym typeface="Garet"/>
-            </a:endParaRPr>
-          </a:p>
-          <a:p>
-            <a:pPr>
-              <a:spcBef>
-                <a:spcPct val="0"/>
-              </a:spcBef>
-            </a:pPr>
-            <a:r>
-              <a:rPr lang="en-US" sz="2800" b="1" spc="-78" dirty="0" err="1">
-                <a:solidFill>
-                  <a:srgbClr val="EBF5FE"/>
-                </a:solidFill>
-                <a:latin typeface="Garet"/>
-                <a:ea typeface="Garet"/>
-                <a:cs typeface="Garet"/>
-                <a:sym typeface="Garet"/>
-              </a:rPr>
-              <a:t>Makefile</a:t>
-            </a:r>
-            <a:r>
-              <a:rPr lang="en-US" sz="2800" b="1" spc="-78" dirty="0">
-                <a:solidFill>
-                  <a:srgbClr val="EBF5FE"/>
-                </a:solidFill>
-                <a:latin typeface="Garet"/>
-                <a:ea typeface="Garet"/>
-                <a:cs typeface="Garet"/>
-                <a:sym typeface="Garet"/>
-              </a:rPr>
-              <a:t>: </a:t>
-            </a:r>
-            <a:endParaRPr lang="sr-Latn-RS" sz="2800" b="1" spc="-78" dirty="0">
-              <a:solidFill>
-                <a:srgbClr val="EBF5FE"/>
-              </a:solidFill>
-              <a:latin typeface="Garet"/>
-              <a:ea typeface="Garet"/>
-              <a:cs typeface="Garet"/>
-              <a:sym typeface="Garet"/>
-            </a:endParaRPr>
-          </a:p>
-          <a:p>
-            <a:pPr>
-              <a:spcBef>
-                <a:spcPct val="0"/>
-              </a:spcBef>
-            </a:pPr>
-            <a:r>
-              <a:rPr lang="en-US" sz="2800" spc="-78" dirty="0" err="1">
-                <a:solidFill>
-                  <a:srgbClr val="EBF5FE"/>
-                </a:solidFill>
-                <a:latin typeface="Garet"/>
-                <a:ea typeface="Garet"/>
-                <a:cs typeface="Garet"/>
-                <a:sym typeface="Garet"/>
-              </a:rPr>
-              <a:t>Korišćen</a:t>
-            </a:r>
-            <a:r>
-              <a:rPr lang="en-US" sz="2800" spc="-78" dirty="0">
-                <a:solidFill>
-                  <a:srgbClr val="EBF5FE"/>
-                </a:solidFill>
-                <a:latin typeface="Garet"/>
-                <a:ea typeface="Garet"/>
-                <a:cs typeface="Garet"/>
-                <a:sym typeface="Garet"/>
-              </a:rPr>
-              <a:t> </a:t>
-            </a:r>
-            <a:r>
-              <a:rPr lang="en-US" sz="2800" i="1" spc="-78" dirty="0">
-                <a:solidFill>
-                  <a:srgbClr val="EBF5FE"/>
-                </a:solidFill>
-                <a:latin typeface="Garet"/>
-                <a:ea typeface="Garet"/>
-                <a:cs typeface="Garet"/>
-                <a:sym typeface="Garet"/>
-              </a:rPr>
-              <a:t>obj-m</a:t>
-            </a:r>
-            <a:r>
-              <a:rPr lang="en-US" sz="2800" spc="-78" dirty="0">
-                <a:solidFill>
-                  <a:srgbClr val="EBF5FE"/>
-                </a:solidFill>
-                <a:latin typeface="Garet"/>
-                <a:ea typeface="Garet"/>
-                <a:cs typeface="Garet"/>
-                <a:sym typeface="Garet"/>
-              </a:rPr>
-              <a:t> </a:t>
-            </a:r>
-            <a:r>
-              <a:rPr lang="en-US" sz="2800" spc="-78" dirty="0" err="1">
-                <a:solidFill>
-                  <a:srgbClr val="EBF5FE"/>
-                </a:solidFill>
-                <a:latin typeface="Garet"/>
-                <a:ea typeface="Garet"/>
-                <a:cs typeface="Garet"/>
-                <a:sym typeface="Garet"/>
-              </a:rPr>
-              <a:t>sistem</a:t>
-            </a:r>
-            <a:r>
-              <a:rPr lang="en-US" sz="2800" spc="-78" dirty="0">
-                <a:solidFill>
-                  <a:srgbClr val="EBF5FE"/>
-                </a:solidFill>
-                <a:latin typeface="Garet"/>
-                <a:ea typeface="Garet"/>
-                <a:cs typeface="Garet"/>
-                <a:sym typeface="Garet"/>
-              </a:rPr>
-              <a:t> za </a:t>
-            </a:r>
-            <a:r>
-              <a:rPr lang="en-US" sz="2800" i="1" spc="-78" dirty="0">
-                <a:solidFill>
-                  <a:srgbClr val="EBF5FE"/>
-                </a:solidFill>
-                <a:latin typeface="Garet"/>
-                <a:ea typeface="Garet"/>
-                <a:cs typeface="Garet"/>
-                <a:sym typeface="Garet"/>
-              </a:rPr>
-              <a:t>build</a:t>
-            </a:r>
-            <a:r>
-              <a:rPr lang="en-US" sz="2800" spc="-78" dirty="0">
-                <a:solidFill>
-                  <a:srgbClr val="EBF5FE"/>
-                </a:solidFill>
-                <a:latin typeface="Garet"/>
-                <a:ea typeface="Garet"/>
-                <a:cs typeface="Garet"/>
-                <a:sym typeface="Garet"/>
-              </a:rPr>
-              <a:t> </a:t>
-            </a:r>
-            <a:r>
-              <a:rPr lang="en-US" sz="2800" spc="-78" dirty="0" err="1">
-                <a:solidFill>
-                  <a:srgbClr val="EBF5FE"/>
-                </a:solidFill>
-                <a:latin typeface="Garet"/>
-                <a:ea typeface="Garet"/>
-                <a:cs typeface="Garet"/>
-                <a:sym typeface="Garet"/>
-              </a:rPr>
-              <a:t>modula</a:t>
-            </a:r>
-            <a:r>
-              <a:rPr lang="en-US" sz="2800" spc="-78" dirty="0">
-                <a:solidFill>
-                  <a:srgbClr val="EBF5FE"/>
-                </a:solidFill>
-                <a:latin typeface="Garet"/>
-                <a:ea typeface="Garet"/>
-                <a:cs typeface="Garet"/>
-                <a:sym typeface="Garet"/>
-              </a:rPr>
-              <a:t> </a:t>
-            </a:r>
-            <a:r>
-              <a:rPr lang="en-US" sz="2800" spc="-78" dirty="0" err="1">
-                <a:solidFill>
-                  <a:srgbClr val="EBF5FE"/>
-                </a:solidFill>
-                <a:latin typeface="Garet"/>
-                <a:ea typeface="Garet"/>
-                <a:cs typeface="Garet"/>
-                <a:sym typeface="Garet"/>
-              </a:rPr>
-              <a:t>specifično</a:t>
-            </a:r>
-            <a:r>
-              <a:rPr lang="en-US" sz="2800" spc="-78" dirty="0">
-                <a:solidFill>
-                  <a:srgbClr val="EBF5FE"/>
-                </a:solidFill>
-                <a:latin typeface="Garet"/>
-                <a:ea typeface="Garet"/>
-                <a:cs typeface="Garet"/>
-                <a:sym typeface="Garet"/>
-              </a:rPr>
-              <a:t> za </a:t>
-            </a:r>
-            <a:r>
-              <a:rPr lang="en-US" sz="2800" spc="-78" dirty="0" err="1">
-                <a:solidFill>
-                  <a:srgbClr val="EBF5FE"/>
-                </a:solidFill>
-                <a:latin typeface="Garet"/>
-                <a:ea typeface="Garet"/>
-                <a:cs typeface="Garet"/>
-                <a:sym typeface="Garet"/>
-              </a:rPr>
-              <a:t>verziju</a:t>
-            </a:r>
-            <a:r>
-              <a:rPr lang="en-US" sz="2800" spc="-78" dirty="0">
-                <a:solidFill>
-                  <a:srgbClr val="EBF5FE"/>
-                </a:solidFill>
-                <a:latin typeface="Garet"/>
-                <a:ea typeface="Garet"/>
-                <a:cs typeface="Garet"/>
-                <a:sym typeface="Garet"/>
-              </a:rPr>
-              <a:t> kernela 6.18.9.</a:t>
+              <a:rPr lang="en-US" sz="2800" spc="-78" dirty="0">
+                <a:solidFill>
+                  <a:srgbClr val="EBF5FE"/>
+                </a:solidFill>
+                <a:latin typeface="Garet"/>
+                <a:ea typeface="Garet"/>
+                <a:cs typeface="Garet"/>
+                <a:sym typeface="Garet"/>
+              </a:rPr>
+              <a:t>), </a:t>
+            </a:r>
+            <a:r>
+              <a:rPr lang="en-US" sz="2800" spc="-78" dirty="0" err="1">
+                <a:solidFill>
+                  <a:srgbClr val="EBF5FE"/>
+                </a:solidFill>
+                <a:latin typeface="Garet"/>
+                <a:ea typeface="Garet"/>
+                <a:cs typeface="Garet"/>
+                <a:sym typeface="Garet"/>
+              </a:rPr>
+              <a:t>prilagođen</a:t>
+            </a:r>
+            <a:r>
+              <a:rPr lang="en-US" sz="2800" spc="-78" dirty="0">
+                <a:solidFill>
+                  <a:srgbClr val="EBF5FE"/>
+                </a:solidFill>
+                <a:latin typeface="Garet"/>
+                <a:ea typeface="Garet"/>
+                <a:cs typeface="Garet"/>
+                <a:sym typeface="Garet"/>
+              </a:rPr>
+              <a:t> za rad </a:t>
+            </a:r>
+            <a:r>
+              <a:rPr lang="en-US" sz="2800" spc="-78" dirty="0" err="1">
+                <a:solidFill>
+                  <a:srgbClr val="EBF5FE"/>
+                </a:solidFill>
+                <a:latin typeface="Garet"/>
+                <a:ea typeface="Garet"/>
+                <a:cs typeface="Garet"/>
+                <a:sym typeface="Garet"/>
+              </a:rPr>
+              <a:t>sa</a:t>
+            </a:r>
+            <a:r>
+              <a:rPr lang="en-US" sz="2800" spc="-78" dirty="0">
+                <a:solidFill>
+                  <a:srgbClr val="EBF5FE"/>
+                </a:solidFill>
+                <a:latin typeface="Garet"/>
+                <a:ea typeface="Garet"/>
+                <a:cs typeface="Garet"/>
+                <a:sym typeface="Garet"/>
+              </a:rPr>
+              <a:t> </a:t>
+            </a:r>
+            <a:r>
+              <a:rPr lang="en-US" sz="2800" spc="-78" dirty="0" err="1">
+                <a:solidFill>
+                  <a:srgbClr val="EBF5FE"/>
+                </a:solidFill>
+                <a:latin typeface="Garet"/>
+                <a:ea typeface="Garet"/>
+                <a:cs typeface="Garet"/>
+                <a:sym typeface="Garet"/>
+              </a:rPr>
+              <a:t>zaglavljima</a:t>
+            </a:r>
+            <a:r>
+              <a:rPr lang="en-US" sz="2800" spc="-78" dirty="0">
+                <a:solidFill>
+                  <a:srgbClr val="EBF5FE"/>
+                </a:solidFill>
+                <a:latin typeface="Garet"/>
+                <a:ea typeface="Garet"/>
+                <a:cs typeface="Garet"/>
+                <a:sym typeface="Garet"/>
+              </a:rPr>
+              <a:t> </a:t>
+            </a:r>
+            <a:r>
+              <a:rPr lang="en-US" sz="2800" spc="-78" dirty="0" err="1">
+                <a:solidFill>
+                  <a:srgbClr val="EBF5FE"/>
+                </a:solidFill>
+                <a:latin typeface="Garet"/>
+                <a:ea typeface="Garet"/>
+                <a:cs typeface="Garet"/>
+                <a:sym typeface="Garet"/>
+              </a:rPr>
+              <a:t>iz</a:t>
+            </a:r>
+            <a:r>
+              <a:rPr lang="en-US" sz="2800" spc="-78" dirty="0">
+                <a:solidFill>
+                  <a:srgbClr val="EBF5FE"/>
+                </a:solidFill>
+                <a:latin typeface="Garet"/>
+                <a:ea typeface="Garet"/>
+                <a:cs typeface="Garet"/>
+                <a:sym typeface="Garet"/>
+              </a:rPr>
+              <a:t> </a:t>
+            </a:r>
+            <a:r>
+              <a:rPr lang="en-US" sz="2800" spc="-78" dirty="0" err="1">
+                <a:solidFill>
+                  <a:srgbClr val="EBF5FE"/>
+                </a:solidFill>
+                <a:latin typeface="Garet"/>
+                <a:ea typeface="Garet"/>
+                <a:cs typeface="Garet"/>
+                <a:sym typeface="Garet"/>
+              </a:rPr>
+              <a:t>verzije</a:t>
+            </a:r>
+            <a:r>
+              <a:rPr lang="en-US" sz="2800" spc="-78" dirty="0">
+                <a:solidFill>
+                  <a:srgbClr val="EBF5FE"/>
+                </a:solidFill>
+                <a:latin typeface="Garet"/>
+                <a:ea typeface="Garet"/>
+                <a:cs typeface="Garet"/>
+                <a:sym typeface="Garet"/>
+              </a:rPr>
+              <a:t> </a:t>
+            </a:r>
+            <a:r>
+              <a:rPr lang="en-US" sz="2800" spc="-78" dirty="0" err="1">
+                <a:solidFill>
+                  <a:srgbClr val="EBF5FE"/>
+                </a:solidFill>
+                <a:latin typeface="Garet"/>
+                <a:ea typeface="Garet"/>
+                <a:cs typeface="Garet"/>
+                <a:sym typeface="Garet"/>
+              </a:rPr>
+              <a:t>kernela</a:t>
+            </a:r>
+            <a:r>
+              <a:rPr lang="en-US" sz="2800" spc="-78" dirty="0">
+                <a:solidFill>
+                  <a:srgbClr val="EBF5FE"/>
+                </a:solidFill>
+                <a:latin typeface="Garet"/>
+                <a:ea typeface="Garet"/>
+                <a:cs typeface="Garet"/>
+                <a:sym typeface="Garet"/>
+              </a:rPr>
+              <a:t> 6.8+.</a:t>
             </a:r>
           </a:p>
         </p:txBody>
@@ -23120,10 +23811,10 @@
             </a:pathLst>
           </a:custGeom>
           <a:blipFill>
-            <a:blip r:embed="rId2">
+            <a:blip>
               <a:extLst>
                 <a:ext uri="{96DAC541-7B7A-43D3-8B79-37D633B846F1}">
-                  <asvg:svgBlip xmlns:asvg="http://schemas.microsoft.com/office/drawing/2016/SVG/main" r:embed="rId3"/>
+                  <asvg:svgBlip xmlns:asvg="http://schemas.microsoft.com/office/drawing/2016/SVG/main" r:embed="rId2"/>
                 </a:ext>
               </a:extLst>
             </a:blip>
@@ -23179,11 +23870,11 @@
             </a:pathLst>
           </a:custGeom>
           <a:blipFill>
-            <a:blip r:embed="rId4">
+            <a:blip>
               <a:alphaModFix amt="48000"/>
               <a:extLst>
                 <a:ext uri="{96DAC541-7B7A-43D3-8B79-37D633B846F1}">
-                  <asvg:svgBlip xmlns:asvg="http://schemas.microsoft.com/office/drawing/2016/SVG/main" r:embed="rId5"/>
+                  <asvg:svgBlip xmlns:asvg="http://schemas.microsoft.com/office/drawing/2016/SVG/main" r:embed="rId3"/>
                 </a:ext>
               </a:extLst>
             </a:blip>
@@ -25056,12 +25747,12 @@
           <p:nvPr/>
         </p:nvPicPr>
         <p:blipFill>
-          <a:blip r:embed="rId6" cstate="print">
+          <a:blip r:embed="rId4" cstate="print">
             <a:grayscl/>
             <a:extLst>
               <a:ext uri="{BEBA8EAE-BF5A-486C-A8C5-ECC9F3942E4B}">
                 <a14:imgProps xmlns:a14="http://schemas.microsoft.com/office/drawing/2010/main">
-                  <a14:imgLayer r:embed="rId7">
+                  <a14:imgLayer r:embed="rId5">
                     <a14:imgEffect>
                       <a14:backgroundRemoval t="3008" b="96241" l="4478" r="96269">
                         <a14:foregroundMark x1="28358" y1="14286" x2="32836" y2="17293"/>
@@ -25147,10 +25838,10 @@
             </a:pathLst>
           </a:custGeom>
           <a:blipFill>
-            <a:blip r:embed="rId8">
+            <a:blip>
               <a:extLst>
                 <a:ext uri="{96DAC541-7B7A-43D3-8B79-37D633B846F1}">
-                  <asvg:svgBlip xmlns:asvg="http://schemas.microsoft.com/office/drawing/2016/SVG/main" r:embed="rId9"/>
+                  <asvg:svgBlip xmlns:asvg="http://schemas.microsoft.com/office/drawing/2016/SVG/main" r:embed="rId6"/>
                 </a:ext>
               </a:extLst>
             </a:blip>
@@ -25251,10 +25942,10 @@
             </a:pathLst>
           </a:custGeom>
           <a:blipFill>
-            <a:blip r:embed="rId2">
+            <a:blip>
               <a:extLst>
                 <a:ext uri="{96DAC541-7B7A-43D3-8B79-37D633B846F1}">
-                  <asvg:svgBlip xmlns:asvg="http://schemas.microsoft.com/office/drawing/2016/SVG/main" r:embed="rId3"/>
+                  <asvg:svgBlip xmlns:asvg="http://schemas.microsoft.com/office/drawing/2016/SVG/main" r:embed="rId2"/>
                 </a:ext>
               </a:extLst>
             </a:blip>
@@ -25310,11 +26001,11 @@
             </a:pathLst>
           </a:custGeom>
           <a:blipFill>
-            <a:blip r:embed="rId4">
+            <a:blip>
               <a:alphaModFix amt="48000"/>
               <a:extLst>
                 <a:ext uri="{96DAC541-7B7A-43D3-8B79-37D633B846F1}">
-                  <asvg:svgBlip xmlns:asvg="http://schemas.microsoft.com/office/drawing/2016/SVG/main" r:embed="rId5"/>
+                  <asvg:svgBlip xmlns:asvg="http://schemas.microsoft.com/office/drawing/2016/SVG/main" r:embed="rId3"/>
                 </a:ext>
               </a:extLst>
             </a:blip>
@@ -27411,12 +28102,12 @@
           <p:nvPr/>
         </p:nvPicPr>
         <p:blipFill>
-          <a:blip r:embed="rId6" cstate="print">
+          <a:blip r:embed="rId4" cstate="print">
             <a:grayscl/>
             <a:extLst>
               <a:ext uri="{BEBA8EAE-BF5A-486C-A8C5-ECC9F3942E4B}">
                 <a14:imgProps xmlns:a14="http://schemas.microsoft.com/office/drawing/2010/main">
-                  <a14:imgLayer r:embed="rId7">
+                  <a14:imgLayer r:embed="rId5">
                     <a14:imgEffect>
                       <a14:backgroundRemoval t="3008" b="96241" l="4478" r="96269">
                         <a14:foregroundMark x1="28358" y1="14286" x2="32836" y2="17293"/>
@@ -27547,10 +28238,10 @@
             </a:pathLst>
           </a:custGeom>
           <a:blipFill>
-            <a:blip r:embed="rId2">
+            <a:blip>
               <a:extLst>
                 <a:ext uri="{96DAC541-7B7A-43D3-8B79-37D633B846F1}">
-                  <asvg:svgBlip xmlns:asvg="http://schemas.microsoft.com/office/drawing/2016/SVG/main" r:embed="rId3"/>
+                  <asvg:svgBlip xmlns:asvg="http://schemas.microsoft.com/office/drawing/2016/SVG/main" r:embed="rId2"/>
                 </a:ext>
               </a:extLst>
             </a:blip>
@@ -27606,11 +28297,11 @@
             </a:pathLst>
           </a:custGeom>
           <a:blipFill>
-            <a:blip r:embed="rId4">
+            <a:blip>
               <a:alphaModFix amt="48000"/>
               <a:extLst>
                 <a:ext uri="{96DAC541-7B7A-43D3-8B79-37D633B846F1}">
-                  <asvg:svgBlip xmlns:asvg="http://schemas.microsoft.com/office/drawing/2016/SVG/main" r:embed="rId5"/>
+                  <asvg:svgBlip xmlns:asvg="http://schemas.microsoft.com/office/drawing/2016/SVG/main" r:embed="rId3"/>
                 </a:ext>
               </a:extLst>
             </a:blip>
@@ -28663,12 +29354,12 @@
           <p:nvPr/>
         </p:nvPicPr>
         <p:blipFill>
-          <a:blip r:embed="rId6" cstate="print">
+          <a:blip r:embed="rId4" cstate="print">
             <a:grayscl/>
             <a:extLst>
               <a:ext uri="{BEBA8EAE-BF5A-486C-A8C5-ECC9F3942E4B}">
                 <a14:imgProps xmlns:a14="http://schemas.microsoft.com/office/drawing/2010/main">
-                  <a14:imgLayer r:embed="rId7">
+                  <a14:imgLayer r:embed="rId5">
                     <a14:imgEffect>
                       <a14:backgroundRemoval t="3008" b="96241" l="4478" r="96269">
                         <a14:foregroundMark x1="28358" y1="14286" x2="32836" y2="17293"/>
